--- a/public/lessons/year-6-maths/autumn/week-5/find-factor-pairs-systematically/teaching-powerpoint-v1.pptx
+++ b/public/lessons/year-6-maths/autumn/week-5/find-factor-pairs-systematically/teaching-powerpoint-v1.pptx
@@ -2,24 +2,24 @@
 <file path=ppt/presentation.xml><?xml version="1.0" encoding="utf-8"?>
 <p:presentation xmlns:p="http://schemas.openxmlformats.org/presentationml/2006/main">
   <p:sldMasterIdLst>
-    <p:sldMasterId xmlns:r="http://schemas.openxmlformats.org/officeDocument/2006/relationships" id="2147483648" r:id="Rd5bc9cc9f2ac4fdb"/>
+    <p:sldMasterId xmlns:r="http://schemas.openxmlformats.org/officeDocument/2006/relationships" id="2147483648" r:id="Rdeaa20de9fef4dbd"/>
   </p:sldMasterIdLst>
   <p:notesMasterIdLst>
-    <p:notesMasterId xmlns:r="http://schemas.openxmlformats.org/officeDocument/2006/relationships" r:id="R2487288587564f26"/>
+    <p:notesMasterId xmlns:r="http://schemas.openxmlformats.org/officeDocument/2006/relationships" r:id="R094db57db51241d4"/>
   </p:notesMasterIdLst>
   <p:sldIdLst>
-    <p:sldId xmlns:r="http://schemas.openxmlformats.org/officeDocument/2006/relationships" id="256" r:id="Rfc87e765b58b41db"/>
-    <p:sldId xmlns:r="http://schemas.openxmlformats.org/officeDocument/2006/relationships" id="257" r:id="Rb6061c4a5c3b4e3a"/>
-    <p:sldId xmlns:r="http://schemas.openxmlformats.org/officeDocument/2006/relationships" id="258" r:id="Rd9a948c4c1634504"/>
-    <p:sldId xmlns:r="http://schemas.openxmlformats.org/officeDocument/2006/relationships" id="259" r:id="R90c03e8e9ffd4d9e"/>
-    <p:sldId xmlns:r="http://schemas.openxmlformats.org/officeDocument/2006/relationships" id="260" r:id="R010a2987d7194ecd"/>
-    <p:sldId xmlns:r="http://schemas.openxmlformats.org/officeDocument/2006/relationships" id="261" r:id="R2f6f4beb5e174667"/>
-    <p:sldId xmlns:r="http://schemas.openxmlformats.org/officeDocument/2006/relationships" id="262" r:id="Rcbb18a5ec00c4490"/>
-    <p:sldId xmlns:r="http://schemas.openxmlformats.org/officeDocument/2006/relationships" id="263" r:id="Rcc51405b163b4dce"/>
-    <p:sldId xmlns:r="http://schemas.openxmlformats.org/officeDocument/2006/relationships" id="264" r:id="Ra38a01c9587e4c64"/>
-    <p:sldId xmlns:r="http://schemas.openxmlformats.org/officeDocument/2006/relationships" id="265" r:id="R73da54c94bcb4313"/>
-    <p:sldId xmlns:r="http://schemas.openxmlformats.org/officeDocument/2006/relationships" id="266" r:id="R42507554efc84431"/>
-    <p:sldId xmlns:r="http://schemas.openxmlformats.org/officeDocument/2006/relationships" id="267" r:id="R2b285efddc004dbf"/>
+    <p:sldId xmlns:r="http://schemas.openxmlformats.org/officeDocument/2006/relationships" id="256" r:id="R4840762b7d3b45d8"/>
+    <p:sldId xmlns:r="http://schemas.openxmlformats.org/officeDocument/2006/relationships" id="257" r:id="Rdae3e973a3694010"/>
+    <p:sldId xmlns:r="http://schemas.openxmlformats.org/officeDocument/2006/relationships" id="258" r:id="Rc9405d5063b540e2"/>
+    <p:sldId xmlns:r="http://schemas.openxmlformats.org/officeDocument/2006/relationships" id="259" r:id="R42246798f1a448e0"/>
+    <p:sldId xmlns:r="http://schemas.openxmlformats.org/officeDocument/2006/relationships" id="260" r:id="R064c8d433f874a92"/>
+    <p:sldId xmlns:r="http://schemas.openxmlformats.org/officeDocument/2006/relationships" id="261" r:id="R20d16473fa7a4ded"/>
+    <p:sldId xmlns:r="http://schemas.openxmlformats.org/officeDocument/2006/relationships" id="262" r:id="Rbf2915edc1e24f45"/>
+    <p:sldId xmlns:r="http://schemas.openxmlformats.org/officeDocument/2006/relationships" id="263" r:id="R3ca6ef8559fc4a55"/>
+    <p:sldId xmlns:r="http://schemas.openxmlformats.org/officeDocument/2006/relationships" id="264" r:id="R2d6a5f03ae8046fd"/>
+    <p:sldId xmlns:r="http://schemas.openxmlformats.org/officeDocument/2006/relationships" id="265" r:id="Rc0a231c342474cd1"/>
+    <p:sldId xmlns:r="http://schemas.openxmlformats.org/officeDocument/2006/relationships" id="266" r:id="R047e8cca8aa94d9c"/>
+    <p:sldId xmlns:r="http://schemas.openxmlformats.org/officeDocument/2006/relationships" id="267" r:id="R0a588fce40484272"/>
   </p:sldIdLst>
   <p:sldSz cx="12192000" cy="6858000"/>
   <p:notesSz cx="6858000" cy="9144000"/>
@@ -873,7 +873,7 @@
           <a:lstStyle xmlns:a="http://schemas.openxmlformats.org/drawingml/2006/main"/>
           <a:p xmlns:a="http://schemas.openxmlformats.org/drawingml/2006/main">
             <a:r>
-              <a:t>I do. Reveal the question, setup and each calculation stage one click at a time. Pupils watch before copying. Model answer: 1 and 72; 2 and 36; 3 and 24; 4 and 18; 6 and 12; 8 and 9.</a:t>
+              <a:t>I do. Reveal the question, then reveal each mathematical change one click at a time. Point to the numbers and operation that changed before moving to the next line. Final answer: 1 and 72; 2 and 36; 3 and 24; 4 and 18; 6 and 12; 8 and 9.</a:t>
             </a:r>
           </a:p>
         </p:txBody>
@@ -1291,7 +1291,7 @@
   </p:cSld>
   <p:clrMap bg1="lt1" tx1="dk1" bg2="lt2" tx2="dk2" accent1="accent1" accent2="accent2" accent3="accent3" accent4="accent4" accent5="accent5" accent6="accent6" hlink="hlink" folHlink="folHlink"/>
   <p:sldLayoutIdLst>
-    <p:sldLayoutId xmlns:r="http://schemas.openxmlformats.org/officeDocument/2006/relationships" id="2147483649" r:id="R607f7064e3af45d5"/>
+    <p:sldLayoutId xmlns:r="http://schemas.openxmlformats.org/officeDocument/2006/relationships" id="2147483649" r:id="R601d249aa3094f0b"/>
   </p:sldLayoutIdLst>
   <p:txStyles>
     <p:titleStyle>
@@ -1842,7 +1842,7 @@
           <p:cNvPr id="12" name="">
             <a:extLst xmlns:a="http://schemas.openxmlformats.org/drawingml/2006/main">
               <a:ext uri="{FF2B5EF4-FFF2-40B4-BE49-F238E27FC236}">
-                <a16:creationId xmlns:a16="http://schemas.microsoft.com/office/drawing/2014/main" id="{BE486A44-49D3-493C-BD58-8490C3752498}"/>
+                <a16:creationId xmlns:a16="http://schemas.microsoft.com/office/drawing/2014/main" id="{F0DA88E8-4A45-45F6-9527-DF353D48A97F}"/>
               </a:ext>
             </a:extLst>
           </p:cNvPr>
@@ -1874,7 +1874,7 @@
           <p:cNvPr id="2" name="">
             <a:extLst xmlns:a="http://schemas.openxmlformats.org/drawingml/2006/main">
               <a:ext uri="{FF2B5EF4-FFF2-40B4-BE49-F238E27FC236}">
-                <a16:creationId xmlns:a16="http://schemas.microsoft.com/office/drawing/2014/main" id="{A3E90847-4610-4420-956A-C1666CEE21CE}"/>
+                <a16:creationId xmlns:a16="http://schemas.microsoft.com/office/drawing/2014/main" id="{87C72412-28C2-42D8-A79E-4F3A1C6E5272}"/>
               </a:ext>
             </a:extLst>
           </p:cNvPr>
@@ -1931,7 +1931,7 @@
           <p:cNvPr id="3" name="">
             <a:extLst xmlns:a="http://schemas.openxmlformats.org/drawingml/2006/main">
               <a:ext uri="{FF2B5EF4-FFF2-40B4-BE49-F238E27FC236}">
-                <a16:creationId xmlns:a16="http://schemas.microsoft.com/office/drawing/2014/main" id="{980CAC59-6B26-4E8D-8BB9-4EDD5BC95948}"/>
+                <a16:creationId xmlns:a16="http://schemas.microsoft.com/office/drawing/2014/main" id="{B995D1F8-00CD-449A-B559-6876269099C5}"/>
               </a:ext>
             </a:extLst>
           </p:cNvPr>
@@ -1965,7 +1965,7 @@
           <p:cNvPr id="4" name="">
             <a:extLst xmlns:a="http://schemas.openxmlformats.org/drawingml/2006/main">
               <a:ext uri="{FF2B5EF4-FFF2-40B4-BE49-F238E27FC236}">
-                <a16:creationId xmlns:a16="http://schemas.microsoft.com/office/drawing/2014/main" id="{3F89CC28-DB57-41A1-A31D-66C53241CBA3}"/>
+                <a16:creationId xmlns:a16="http://schemas.microsoft.com/office/drawing/2014/main" id="{3794482A-C242-4C11-B63B-612D6A2B7344}"/>
               </a:ext>
             </a:extLst>
           </p:cNvPr>
@@ -2022,7 +2022,7 @@
           <p:cNvPr id="5" name="">
             <a:extLst xmlns:a="http://schemas.openxmlformats.org/drawingml/2006/main">
               <a:ext uri="{FF2B5EF4-FFF2-40B4-BE49-F238E27FC236}">
-                <a16:creationId xmlns:a16="http://schemas.microsoft.com/office/drawing/2014/main" id="{0F50B447-A9BB-4361-B82B-0BF1423FD728}"/>
+                <a16:creationId xmlns:a16="http://schemas.microsoft.com/office/drawing/2014/main" id="{94E0D13A-F4D2-45F3-A4B7-249664EAF42C}"/>
               </a:ext>
             </a:extLst>
           </p:cNvPr>
@@ -2079,7 +2079,7 @@
           <p:cNvPr id="6" name="">
             <a:extLst xmlns:a="http://schemas.openxmlformats.org/drawingml/2006/main">
               <a:ext uri="{FF2B5EF4-FFF2-40B4-BE49-F238E27FC236}">
-                <a16:creationId xmlns:a16="http://schemas.microsoft.com/office/drawing/2014/main" id="{0886284A-B334-44C6-94A1-BAB83C1B0A26}"/>
+                <a16:creationId xmlns:a16="http://schemas.microsoft.com/office/drawing/2014/main" id="{4A6DD951-6734-4D21-9DD4-06D2D74D4D29}"/>
               </a:ext>
             </a:extLst>
           </p:cNvPr>
@@ -2113,7 +2113,7 @@
           <p:cNvPr id="7" name="">
             <a:extLst xmlns:a="http://schemas.openxmlformats.org/drawingml/2006/main">
               <a:ext uri="{FF2B5EF4-FFF2-40B4-BE49-F238E27FC236}">
-                <a16:creationId xmlns:a16="http://schemas.microsoft.com/office/drawing/2014/main" id="{EABFFC9E-B243-4385-88B8-4D6C4F26DC5B}"/>
+                <a16:creationId xmlns:a16="http://schemas.microsoft.com/office/drawing/2014/main" id="{DCD89C3F-C2D9-4200-A9F6-A72B934EB633}"/>
               </a:ext>
             </a:extLst>
           </p:cNvPr>
@@ -2170,7 +2170,7 @@
           <p:cNvPr id="8" name="">
             <a:extLst xmlns:a="http://schemas.openxmlformats.org/drawingml/2006/main">
               <a:ext uri="{FF2B5EF4-FFF2-40B4-BE49-F238E27FC236}">
-                <a16:creationId xmlns:a16="http://schemas.microsoft.com/office/drawing/2014/main" id="{F92AAA1D-645D-4D41-A6C1-A8FA5C98E8F6}"/>
+                <a16:creationId xmlns:a16="http://schemas.microsoft.com/office/drawing/2014/main" id="{FAF61BE5-F82B-41D7-98D3-4BA85B8BF9BB}"/>
               </a:ext>
             </a:extLst>
           </p:cNvPr>
@@ -2227,7 +2227,7 @@
           <p:cNvPr id="9" name="">
             <a:extLst xmlns:a="http://schemas.openxmlformats.org/drawingml/2006/main">
               <a:ext uri="{FF2B5EF4-FFF2-40B4-BE49-F238E27FC236}">
-                <a16:creationId xmlns:a16="http://schemas.microsoft.com/office/drawing/2014/main" id="{732F3729-91B6-4B63-85E0-DE16536F7ABB}"/>
+                <a16:creationId xmlns:a16="http://schemas.microsoft.com/office/drawing/2014/main" id="{0AC4935D-B6EA-428E-B32C-9CE3F506435C}"/>
               </a:ext>
             </a:extLst>
           </p:cNvPr>
@@ -2284,7 +2284,7 @@
           <p:cNvPr id="10" name="">
             <a:extLst xmlns:a="http://schemas.openxmlformats.org/drawingml/2006/main">
               <a:ext uri="{FF2B5EF4-FFF2-40B4-BE49-F238E27FC236}">
-                <a16:creationId xmlns:a16="http://schemas.microsoft.com/office/drawing/2014/main" id="{EFCB33C7-EBA5-42FF-B802-E8E121B49A48}"/>
+                <a16:creationId xmlns:a16="http://schemas.microsoft.com/office/drawing/2014/main" id="{3831B696-C861-4EC3-B3AE-CC22BFAE34E4}"/>
               </a:ext>
             </a:extLst>
           </p:cNvPr>
@@ -2341,7 +2341,7 @@
           <p:cNvPr id="11" name="">
             <a:extLst xmlns:a="http://schemas.openxmlformats.org/drawingml/2006/main">
               <a:ext uri="{FF2B5EF4-FFF2-40B4-BE49-F238E27FC236}">
-                <a16:creationId xmlns:a16="http://schemas.microsoft.com/office/drawing/2014/main" id="{06E9EBEB-DBF8-4F55-8BF8-C4FBE20D56C0}"/>
+                <a16:creationId xmlns:a16="http://schemas.microsoft.com/office/drawing/2014/main" id="{21F20865-07F0-4E0A-93E2-3FA92C964EAA}"/>
               </a:ext>
             </a:extLst>
           </p:cNvPr>
@@ -2396,7 +2396,7 @@
     </p:spTree>
     <p:extLst>
       <p:ext uri="{BB962C8B-B14F-4D97-AF65-F5344CB8AC3E}">
-        <p14:creationId xmlns:p14="http://schemas.microsoft.com/office/powerpoint/2010/main" val="2102160476"/>
+        <p14:creationId xmlns:p14="http://schemas.microsoft.com/office/powerpoint/2010/main" val="1583144659"/>
       </p:ext>
     </p:extLst>
   </p:cSld>
@@ -2427,7 +2427,7 @@
           <p:cNvPr id="14" name="">
             <a:extLst xmlns:a="http://schemas.openxmlformats.org/drawingml/2006/main">
               <a:ext uri="{FF2B5EF4-FFF2-40B4-BE49-F238E27FC236}">
-                <a16:creationId xmlns:a16="http://schemas.microsoft.com/office/drawing/2014/main" id="{0C691C6F-AE24-4E37-9F7C-DC2835E84268}"/>
+                <a16:creationId xmlns:a16="http://schemas.microsoft.com/office/drawing/2014/main" id="{4412D817-21D3-4916-BFC0-11E05ECBE3AA}"/>
               </a:ext>
             </a:extLst>
           </p:cNvPr>
@@ -2459,7 +2459,7 @@
           <p:cNvPr id="2" name="">
             <a:extLst xmlns:a="http://schemas.openxmlformats.org/drawingml/2006/main">
               <a:ext uri="{FF2B5EF4-FFF2-40B4-BE49-F238E27FC236}">
-                <a16:creationId xmlns:a16="http://schemas.microsoft.com/office/drawing/2014/main" id="{EB7FC423-703A-4BE8-8B94-F6EDC0827461}"/>
+                <a16:creationId xmlns:a16="http://schemas.microsoft.com/office/drawing/2014/main" id="{5AF729B1-5F6B-4322-B338-E75F5D2AF7F1}"/>
               </a:ext>
             </a:extLst>
           </p:cNvPr>
@@ -2516,7 +2516,7 @@
           <p:cNvPr id="3" name="">
             <a:extLst xmlns:a="http://schemas.openxmlformats.org/drawingml/2006/main">
               <a:ext uri="{FF2B5EF4-FFF2-40B4-BE49-F238E27FC236}">
-                <a16:creationId xmlns:a16="http://schemas.microsoft.com/office/drawing/2014/main" id="{314A4637-75D5-441F-AA85-AD78D4B6DDD8}"/>
+                <a16:creationId xmlns:a16="http://schemas.microsoft.com/office/drawing/2014/main" id="{3CD3E118-EEDC-4CD0-91DE-437965728638}"/>
               </a:ext>
             </a:extLst>
           </p:cNvPr>
@@ -2548,7 +2548,7 @@
           <p:cNvPr id="4" name="">
             <a:extLst xmlns:a="http://schemas.openxmlformats.org/drawingml/2006/main">
               <a:ext uri="{FF2B5EF4-FFF2-40B4-BE49-F238E27FC236}">
-                <a16:creationId xmlns:a16="http://schemas.microsoft.com/office/drawing/2014/main" id="{ACE42DE3-FCF2-4D4A-A5E8-EC3CCD595274}"/>
+                <a16:creationId xmlns:a16="http://schemas.microsoft.com/office/drawing/2014/main" id="{9FDA16F4-1B99-47CC-A723-90682D9EE37A}"/>
               </a:ext>
             </a:extLst>
           </p:cNvPr>
@@ -2605,7 +2605,7 @@
           <p:cNvPr id="5" name="">
             <a:extLst xmlns:a="http://schemas.openxmlformats.org/drawingml/2006/main">
               <a:ext uri="{FF2B5EF4-FFF2-40B4-BE49-F238E27FC236}">
-                <a16:creationId xmlns:a16="http://schemas.microsoft.com/office/drawing/2014/main" id="{43DF80CE-9CDE-4C6B-9C27-D0041C9BD678}"/>
+                <a16:creationId xmlns:a16="http://schemas.microsoft.com/office/drawing/2014/main" id="{4B336617-5295-43D5-8431-77C39DA6D244}"/>
               </a:ext>
             </a:extLst>
           </p:cNvPr>
@@ -2662,7 +2662,7 @@
           <p:cNvPr id="6" name="">
             <a:extLst xmlns:a="http://schemas.openxmlformats.org/drawingml/2006/main">
               <a:ext uri="{FF2B5EF4-FFF2-40B4-BE49-F238E27FC236}">
-                <a16:creationId xmlns:a16="http://schemas.microsoft.com/office/drawing/2014/main" id="{E68C0E46-C566-40BB-B2CB-1F0BDACC4178}"/>
+                <a16:creationId xmlns:a16="http://schemas.microsoft.com/office/drawing/2014/main" id="{2576070C-2A68-44FD-8C96-92474913AD8D}"/>
               </a:ext>
             </a:extLst>
           </p:cNvPr>
@@ -2719,7 +2719,7 @@
           <p:cNvPr id="7" name="">
             <a:extLst xmlns:a="http://schemas.openxmlformats.org/drawingml/2006/main">
               <a:ext uri="{FF2B5EF4-FFF2-40B4-BE49-F238E27FC236}">
-                <a16:creationId xmlns:a16="http://schemas.microsoft.com/office/drawing/2014/main" id="{FE59DD1F-8AE6-480C-97D0-6B07BF9ACE31}"/>
+                <a16:creationId xmlns:a16="http://schemas.microsoft.com/office/drawing/2014/main" id="{9D9F86F2-6358-46EA-AE78-922331E4751F}"/>
               </a:ext>
             </a:extLst>
           </p:cNvPr>
@@ -2751,7 +2751,7 @@
           <p:cNvPr id="8" name="">
             <a:extLst xmlns:a="http://schemas.openxmlformats.org/drawingml/2006/main">
               <a:ext uri="{FF2B5EF4-FFF2-40B4-BE49-F238E27FC236}">
-                <a16:creationId xmlns:a16="http://schemas.microsoft.com/office/drawing/2014/main" id="{D547D835-0BA7-4B6E-9751-A9703AEB15B8}"/>
+                <a16:creationId xmlns:a16="http://schemas.microsoft.com/office/drawing/2014/main" id="{3DA98C12-A14E-4710-A7BC-2F398FFFC368}"/>
               </a:ext>
             </a:extLst>
           </p:cNvPr>
@@ -2808,7 +2808,7 @@
           <p:cNvPr id="9" name="">
             <a:extLst xmlns:a="http://schemas.openxmlformats.org/drawingml/2006/main">
               <a:ext uri="{FF2B5EF4-FFF2-40B4-BE49-F238E27FC236}">
-                <a16:creationId xmlns:a16="http://schemas.microsoft.com/office/drawing/2014/main" id="{C14F33CE-E201-4C0C-8E2B-1CBD96E3D769}"/>
+                <a16:creationId xmlns:a16="http://schemas.microsoft.com/office/drawing/2014/main" id="{7411BECB-19AA-45B5-B57E-766ADD0979B9}"/>
               </a:ext>
             </a:extLst>
           </p:cNvPr>
@@ -2865,7 +2865,7 @@
           <p:cNvPr id="10" name="">
             <a:extLst xmlns:a="http://schemas.openxmlformats.org/drawingml/2006/main">
               <a:ext uri="{FF2B5EF4-FFF2-40B4-BE49-F238E27FC236}">
-                <a16:creationId xmlns:a16="http://schemas.microsoft.com/office/drawing/2014/main" id="{263EDB50-7505-4700-9C30-DA70265594F4}"/>
+                <a16:creationId xmlns:a16="http://schemas.microsoft.com/office/drawing/2014/main" id="{43A15DDB-835A-45B1-8E25-C4391F7A3088}"/>
               </a:ext>
             </a:extLst>
           </p:cNvPr>
@@ -2922,7 +2922,7 @@
           <p:cNvPr id="11" name="">
             <a:extLst xmlns:a="http://schemas.openxmlformats.org/drawingml/2006/main">
               <a:ext uri="{FF2B5EF4-FFF2-40B4-BE49-F238E27FC236}">
-                <a16:creationId xmlns:a16="http://schemas.microsoft.com/office/drawing/2014/main" id="{9F98B11D-2FE2-4D8E-ACF2-A703F124DB97}"/>
+                <a16:creationId xmlns:a16="http://schemas.microsoft.com/office/drawing/2014/main" id="{A7A0ED05-10A3-4D08-B648-BE5F70DE0321}"/>
               </a:ext>
             </a:extLst>
           </p:cNvPr>
@@ -2979,7 +2979,7 @@
           <p:cNvPr id="12" name="">
             <a:extLst xmlns:a="http://schemas.openxmlformats.org/drawingml/2006/main">
               <a:ext uri="{FF2B5EF4-FFF2-40B4-BE49-F238E27FC236}">
-                <a16:creationId xmlns:a16="http://schemas.microsoft.com/office/drawing/2014/main" id="{B4778253-1A5C-4A9A-A0FC-B205C87098CF}"/>
+                <a16:creationId xmlns:a16="http://schemas.microsoft.com/office/drawing/2014/main" id="{763B353B-320B-4BCF-ABF5-856407D6978C}"/>
               </a:ext>
             </a:extLst>
           </p:cNvPr>
@@ -3036,7 +3036,7 @@
           <p:cNvPr id="13" name="">
             <a:extLst xmlns:a="http://schemas.openxmlformats.org/drawingml/2006/main">
               <a:ext uri="{FF2B5EF4-FFF2-40B4-BE49-F238E27FC236}">
-                <a16:creationId xmlns:a16="http://schemas.microsoft.com/office/drawing/2014/main" id="{68D6F20A-9CB0-4821-85A0-845B0A449E83}"/>
+                <a16:creationId xmlns:a16="http://schemas.microsoft.com/office/drawing/2014/main" id="{8BB40981-7766-442A-B7E4-A10C9388B4ED}"/>
               </a:ext>
             </a:extLst>
           </p:cNvPr>
@@ -3091,7 +3091,7 @@
     </p:spTree>
     <p:extLst>
       <p:ext uri="{BB962C8B-B14F-4D97-AF65-F5344CB8AC3E}">
-        <p14:creationId xmlns:p14="http://schemas.microsoft.com/office/powerpoint/2010/main" val="524831925"/>
+        <p14:creationId xmlns:p14="http://schemas.microsoft.com/office/powerpoint/2010/main" val="729035181"/>
       </p:ext>
     </p:extLst>
   </p:cSld>
@@ -3292,7 +3292,7 @@
           <p:cNvPr id="19" name="">
             <a:extLst xmlns:a="http://schemas.openxmlformats.org/drawingml/2006/main">
               <a:ext uri="{FF2B5EF4-FFF2-40B4-BE49-F238E27FC236}">
-                <a16:creationId xmlns:a16="http://schemas.microsoft.com/office/drawing/2014/main" id="{F1CD97D4-677C-446A-A161-3F3E99CF941E}"/>
+                <a16:creationId xmlns:a16="http://schemas.microsoft.com/office/drawing/2014/main" id="{DAEB09E6-0A14-465E-88B7-2B0A63F5DCBF}"/>
               </a:ext>
             </a:extLst>
           </p:cNvPr>
@@ -3324,7 +3324,7 @@
           <p:cNvPr id="2" name="">
             <a:extLst xmlns:a="http://schemas.openxmlformats.org/drawingml/2006/main">
               <a:ext uri="{FF2B5EF4-FFF2-40B4-BE49-F238E27FC236}">
-                <a16:creationId xmlns:a16="http://schemas.microsoft.com/office/drawing/2014/main" id="{8CAC2B72-AF6B-4FE5-99C8-3793C2AC13BF}"/>
+                <a16:creationId xmlns:a16="http://schemas.microsoft.com/office/drawing/2014/main" id="{185BC3BD-5C32-41A9-B584-39D0D06694DF}"/>
               </a:ext>
             </a:extLst>
           </p:cNvPr>
@@ -3381,7 +3381,7 @@
           <p:cNvPr id="3" name="">
             <a:extLst xmlns:a="http://schemas.openxmlformats.org/drawingml/2006/main">
               <a:ext uri="{FF2B5EF4-FFF2-40B4-BE49-F238E27FC236}">
-                <a16:creationId xmlns:a16="http://schemas.microsoft.com/office/drawing/2014/main" id="{6AE62A93-F110-4F48-80E3-192D94A484D9}"/>
+                <a16:creationId xmlns:a16="http://schemas.microsoft.com/office/drawing/2014/main" id="{F616DB9B-3BD8-4FB5-B759-BEADE3A456E4}"/>
               </a:ext>
             </a:extLst>
           </p:cNvPr>
@@ -3413,7 +3413,7 @@
           <p:cNvPr id="4" name="">
             <a:extLst xmlns:a="http://schemas.openxmlformats.org/drawingml/2006/main">
               <a:ext uri="{FF2B5EF4-FFF2-40B4-BE49-F238E27FC236}">
-                <a16:creationId xmlns:a16="http://schemas.microsoft.com/office/drawing/2014/main" id="{24C52DFD-115C-4E28-9106-6A0CF4F441C7}"/>
+                <a16:creationId xmlns:a16="http://schemas.microsoft.com/office/drawing/2014/main" id="{059F3E41-8A46-4E57-B26F-9E2E9B7FB1DD}"/>
               </a:ext>
             </a:extLst>
           </p:cNvPr>
@@ -3470,7 +3470,7 @@
           <p:cNvPr id="5" name="">
             <a:extLst xmlns:a="http://schemas.openxmlformats.org/drawingml/2006/main">
               <a:ext uri="{FF2B5EF4-FFF2-40B4-BE49-F238E27FC236}">
-                <a16:creationId xmlns:a16="http://schemas.microsoft.com/office/drawing/2014/main" id="{538CF74F-1A8A-4251-8DC2-5944CC0486AC}"/>
+                <a16:creationId xmlns:a16="http://schemas.microsoft.com/office/drawing/2014/main" id="{9857F6F7-4F8F-404D-918D-4F03488A009B}"/>
               </a:ext>
             </a:extLst>
           </p:cNvPr>
@@ -3527,7 +3527,7 @@
           <p:cNvPr id="6" name="">
             <a:extLst xmlns:a="http://schemas.openxmlformats.org/drawingml/2006/main">
               <a:ext uri="{FF2B5EF4-FFF2-40B4-BE49-F238E27FC236}">
-                <a16:creationId xmlns:a16="http://schemas.microsoft.com/office/drawing/2014/main" id="{BB8C90D7-13AD-4247-A42F-19863E101A11}"/>
+                <a16:creationId xmlns:a16="http://schemas.microsoft.com/office/drawing/2014/main" id="{67ACDCBD-AF1C-4AD2-BF1B-256031554A2C}"/>
               </a:ext>
             </a:extLst>
           </p:cNvPr>
@@ -3584,7 +3584,7 @@
           <p:cNvPr id="7" name="">
             <a:extLst xmlns:a="http://schemas.openxmlformats.org/drawingml/2006/main">
               <a:ext uri="{FF2B5EF4-FFF2-40B4-BE49-F238E27FC236}">
-                <a16:creationId xmlns:a16="http://schemas.microsoft.com/office/drawing/2014/main" id="{9C8006E7-738B-4620-8188-7239CD2C5DF6}"/>
+                <a16:creationId xmlns:a16="http://schemas.microsoft.com/office/drawing/2014/main" id="{2EE9CCE0-A2F0-4D1D-8F23-1ED6EB45CF2A}"/>
               </a:ext>
             </a:extLst>
           </p:cNvPr>
@@ -3616,7 +3616,7 @@
           <p:cNvPr id="8" name="">
             <a:extLst xmlns:a="http://schemas.openxmlformats.org/drawingml/2006/main">
               <a:ext uri="{FF2B5EF4-FFF2-40B4-BE49-F238E27FC236}">
-                <a16:creationId xmlns:a16="http://schemas.microsoft.com/office/drawing/2014/main" id="{CD895207-1A73-421E-B7BD-8762548C2F05}"/>
+                <a16:creationId xmlns:a16="http://schemas.microsoft.com/office/drawing/2014/main" id="{A18F675A-A842-4B09-B28F-467FC4AFEEBF}"/>
               </a:ext>
             </a:extLst>
           </p:cNvPr>
@@ -3673,7 +3673,7 @@
           <p:cNvPr id="9" name="">
             <a:extLst xmlns:a="http://schemas.openxmlformats.org/drawingml/2006/main">
               <a:ext uri="{FF2B5EF4-FFF2-40B4-BE49-F238E27FC236}">
-                <a16:creationId xmlns:a16="http://schemas.microsoft.com/office/drawing/2014/main" id="{811CA0BF-6EF9-435E-9C3D-C1C42AB8FBF2}"/>
+                <a16:creationId xmlns:a16="http://schemas.microsoft.com/office/drawing/2014/main" id="{01279FC2-AF47-48FD-B731-5FB4EEB9A308}"/>
               </a:ext>
             </a:extLst>
           </p:cNvPr>
@@ -3730,7 +3730,7 @@
           <p:cNvPr id="10" name="">
             <a:extLst xmlns:a="http://schemas.openxmlformats.org/drawingml/2006/main">
               <a:ext uri="{FF2B5EF4-FFF2-40B4-BE49-F238E27FC236}">
-                <a16:creationId xmlns:a16="http://schemas.microsoft.com/office/drawing/2014/main" id="{DBDE8498-FFD5-4F28-BE1A-EDE9D8EAE1D0}"/>
+                <a16:creationId xmlns:a16="http://schemas.microsoft.com/office/drawing/2014/main" id="{7E4EB408-A114-4153-A7FF-CCC0D3A1A70A}"/>
               </a:ext>
             </a:extLst>
           </p:cNvPr>
@@ -3787,7 +3787,7 @@
           <p:cNvPr id="11" name="">
             <a:extLst xmlns:a="http://schemas.openxmlformats.org/drawingml/2006/main">
               <a:ext uri="{FF2B5EF4-FFF2-40B4-BE49-F238E27FC236}">
-                <a16:creationId xmlns:a16="http://schemas.microsoft.com/office/drawing/2014/main" id="{75B9D70C-E2E2-43E2-886E-815D8E57B111}"/>
+                <a16:creationId xmlns:a16="http://schemas.microsoft.com/office/drawing/2014/main" id="{1517CE96-9A8A-4B4D-B7D8-399D9497CACB}"/>
               </a:ext>
             </a:extLst>
           </p:cNvPr>
@@ -3821,7 +3821,7 @@
           <p:cNvPr id="12" name="">
             <a:extLst xmlns:a="http://schemas.openxmlformats.org/drawingml/2006/main">
               <a:ext uri="{FF2B5EF4-FFF2-40B4-BE49-F238E27FC236}">
-                <a16:creationId xmlns:a16="http://schemas.microsoft.com/office/drawing/2014/main" id="{0FCC1BC5-B8AF-4959-9DDA-79B774239D5B}"/>
+                <a16:creationId xmlns:a16="http://schemas.microsoft.com/office/drawing/2014/main" id="{DEEFB14F-154D-4B7E-B3A8-E78711AC8EF4}"/>
               </a:ext>
             </a:extLst>
           </p:cNvPr>
@@ -3878,7 +3878,7 @@
           <p:cNvPr id="13" name="">
             <a:extLst xmlns:a="http://schemas.openxmlformats.org/drawingml/2006/main">
               <a:ext uri="{FF2B5EF4-FFF2-40B4-BE49-F238E27FC236}">
-                <a16:creationId xmlns:a16="http://schemas.microsoft.com/office/drawing/2014/main" id="{072A7FB3-B7ED-457B-AEBE-37A14A4C6460}"/>
+                <a16:creationId xmlns:a16="http://schemas.microsoft.com/office/drawing/2014/main" id="{C0F2B916-CBD3-4508-BAF9-E98B4228B135}"/>
               </a:ext>
             </a:extLst>
           </p:cNvPr>
@@ -3935,7 +3935,7 @@
           <p:cNvPr id="14" name="">
             <a:extLst xmlns:a="http://schemas.openxmlformats.org/drawingml/2006/main">
               <a:ext uri="{FF2B5EF4-FFF2-40B4-BE49-F238E27FC236}">
-                <a16:creationId xmlns:a16="http://schemas.microsoft.com/office/drawing/2014/main" id="{FC560F39-8A59-4656-A014-DD13223978F6}"/>
+                <a16:creationId xmlns:a16="http://schemas.microsoft.com/office/drawing/2014/main" id="{75F0138C-37C7-4B8C-B450-100E34856765}"/>
               </a:ext>
             </a:extLst>
           </p:cNvPr>
@@ -3992,7 +3992,7 @@
           <p:cNvPr id="15" name="">
             <a:extLst xmlns:a="http://schemas.openxmlformats.org/drawingml/2006/main">
               <a:ext uri="{FF2B5EF4-FFF2-40B4-BE49-F238E27FC236}">
-                <a16:creationId xmlns:a16="http://schemas.microsoft.com/office/drawing/2014/main" id="{F5F55EEB-6536-470D-A63F-793A4160C502}"/>
+                <a16:creationId xmlns:a16="http://schemas.microsoft.com/office/drawing/2014/main" id="{3F8C169E-DF01-453E-A5A3-28B38F56949D}"/>
               </a:ext>
             </a:extLst>
           </p:cNvPr>
@@ -4026,7 +4026,7 @@
           <p:cNvPr id="16" name="">
             <a:extLst xmlns:a="http://schemas.openxmlformats.org/drawingml/2006/main">
               <a:ext uri="{FF2B5EF4-FFF2-40B4-BE49-F238E27FC236}">
-                <a16:creationId xmlns:a16="http://schemas.microsoft.com/office/drawing/2014/main" id="{0B66850C-C5C5-4EAC-8F50-6F46FC699E4A}"/>
+                <a16:creationId xmlns:a16="http://schemas.microsoft.com/office/drawing/2014/main" id="{54089CE9-2ECD-4AC1-9541-17EA33DAD6F3}"/>
               </a:ext>
             </a:extLst>
           </p:cNvPr>
@@ -4083,7 +4083,7 @@
           <p:cNvPr id="17" name="">
             <a:extLst xmlns:a="http://schemas.openxmlformats.org/drawingml/2006/main">
               <a:ext uri="{FF2B5EF4-FFF2-40B4-BE49-F238E27FC236}">
-                <a16:creationId xmlns:a16="http://schemas.microsoft.com/office/drawing/2014/main" id="{301A665C-F60D-41DD-ACC8-682110BA7A61}"/>
+                <a16:creationId xmlns:a16="http://schemas.microsoft.com/office/drawing/2014/main" id="{2D9273E2-A0FF-4103-95DC-3F3D7809E33C}"/>
               </a:ext>
             </a:extLst>
           </p:cNvPr>
@@ -4140,7 +4140,7 @@
           <p:cNvPr id="18" name="">
             <a:extLst xmlns:a="http://schemas.openxmlformats.org/drawingml/2006/main">
               <a:ext uri="{FF2B5EF4-FFF2-40B4-BE49-F238E27FC236}">
-                <a16:creationId xmlns:a16="http://schemas.microsoft.com/office/drawing/2014/main" id="{76B20C14-C8C4-461A-BD65-247589ECE7B5}"/>
+                <a16:creationId xmlns:a16="http://schemas.microsoft.com/office/drawing/2014/main" id="{1B87EE52-F074-4265-ABFE-34E4A44732EF}"/>
               </a:ext>
             </a:extLst>
           </p:cNvPr>
@@ -4195,7 +4195,7 @@
     </p:spTree>
     <p:extLst>
       <p:ext uri="{BB962C8B-B14F-4D97-AF65-F5344CB8AC3E}">
-        <p14:creationId xmlns:p14="http://schemas.microsoft.com/office/powerpoint/2010/main" val="629531717"/>
+        <p14:creationId xmlns:p14="http://schemas.microsoft.com/office/powerpoint/2010/main" val="810759574"/>
       </p:ext>
     </p:extLst>
   </p:cSld>
@@ -4350,7 +4350,7 @@
           <p:cNvPr id="23" name="">
             <a:extLst xmlns:a="http://schemas.openxmlformats.org/drawingml/2006/main">
               <a:ext uri="{FF2B5EF4-FFF2-40B4-BE49-F238E27FC236}">
-                <a16:creationId xmlns:a16="http://schemas.microsoft.com/office/drawing/2014/main" id="{A7C5E0F2-4EE6-4F89-BC9B-40DA24CE2406}"/>
+                <a16:creationId xmlns:a16="http://schemas.microsoft.com/office/drawing/2014/main" id="{3CB932C2-5433-4A56-BD74-54BF04BAE83A}"/>
               </a:ext>
             </a:extLst>
           </p:cNvPr>
@@ -4382,7 +4382,7 @@
           <p:cNvPr id="2" name="">
             <a:extLst xmlns:a="http://schemas.openxmlformats.org/drawingml/2006/main">
               <a:ext uri="{FF2B5EF4-FFF2-40B4-BE49-F238E27FC236}">
-                <a16:creationId xmlns:a16="http://schemas.microsoft.com/office/drawing/2014/main" id="{E2FE504C-3A23-48A1-AE7C-4C3700C23D43}"/>
+                <a16:creationId xmlns:a16="http://schemas.microsoft.com/office/drawing/2014/main" id="{36012004-9FF7-4F96-9D03-72700AB6B31C}"/>
               </a:ext>
             </a:extLst>
           </p:cNvPr>
@@ -4439,7 +4439,7 @@
           <p:cNvPr id="3" name="">
             <a:extLst xmlns:a="http://schemas.openxmlformats.org/drawingml/2006/main">
               <a:ext uri="{FF2B5EF4-FFF2-40B4-BE49-F238E27FC236}">
-                <a16:creationId xmlns:a16="http://schemas.microsoft.com/office/drawing/2014/main" id="{9A8F708E-75AC-438F-B138-16E8EE31F2D4}"/>
+                <a16:creationId xmlns:a16="http://schemas.microsoft.com/office/drawing/2014/main" id="{B55E20D2-4DEF-4EBF-AA98-4E7781ED096A}"/>
               </a:ext>
             </a:extLst>
           </p:cNvPr>
@@ -4471,7 +4471,7 @@
           <p:cNvPr id="4" name="">
             <a:extLst xmlns:a="http://schemas.openxmlformats.org/drawingml/2006/main">
               <a:ext uri="{FF2B5EF4-FFF2-40B4-BE49-F238E27FC236}">
-                <a16:creationId xmlns:a16="http://schemas.microsoft.com/office/drawing/2014/main" id="{591AF4D2-969E-4CC7-BD6C-09A0A25D8430}"/>
+                <a16:creationId xmlns:a16="http://schemas.microsoft.com/office/drawing/2014/main" id="{C5358035-E86C-4AB4-88C5-52866FD06BAE}"/>
               </a:ext>
             </a:extLst>
           </p:cNvPr>
@@ -4528,7 +4528,7 @@
           <p:cNvPr id="5" name="">
             <a:extLst xmlns:a="http://schemas.openxmlformats.org/drawingml/2006/main">
               <a:ext uri="{FF2B5EF4-FFF2-40B4-BE49-F238E27FC236}">
-                <a16:creationId xmlns:a16="http://schemas.microsoft.com/office/drawing/2014/main" id="{D6A1738D-42A4-4B65-B9E0-083BC22D6056}"/>
+                <a16:creationId xmlns:a16="http://schemas.microsoft.com/office/drawing/2014/main" id="{9C4D7FDA-0338-4229-92EB-AFA0128A7266}"/>
               </a:ext>
             </a:extLst>
           </p:cNvPr>
@@ -4585,7 +4585,7 @@
           <p:cNvPr id="6" name="">
             <a:extLst xmlns:a="http://schemas.openxmlformats.org/drawingml/2006/main">
               <a:ext uri="{FF2B5EF4-FFF2-40B4-BE49-F238E27FC236}">
-                <a16:creationId xmlns:a16="http://schemas.microsoft.com/office/drawing/2014/main" id="{8957AEBD-F604-44BB-BD8E-B017CB86D577}"/>
+                <a16:creationId xmlns:a16="http://schemas.microsoft.com/office/drawing/2014/main" id="{628D128A-1BF2-4F20-8E18-BE80FA5E82CC}"/>
               </a:ext>
             </a:extLst>
           </p:cNvPr>
@@ -4642,7 +4642,7 @@
           <p:cNvPr id="7" name="">
             <a:extLst xmlns:a="http://schemas.openxmlformats.org/drawingml/2006/main">
               <a:ext uri="{FF2B5EF4-FFF2-40B4-BE49-F238E27FC236}">
-                <a16:creationId xmlns:a16="http://schemas.microsoft.com/office/drawing/2014/main" id="{DF0CBC68-C352-4EEC-83E9-D416A09FCFAF}"/>
+                <a16:creationId xmlns:a16="http://schemas.microsoft.com/office/drawing/2014/main" id="{A20CD2EE-1B9D-4853-988D-BFA8967B0C62}"/>
               </a:ext>
             </a:extLst>
           </p:cNvPr>
@@ -4674,7 +4674,7 @@
           <p:cNvPr id="8" name="">
             <a:extLst xmlns:a="http://schemas.openxmlformats.org/drawingml/2006/main">
               <a:ext uri="{FF2B5EF4-FFF2-40B4-BE49-F238E27FC236}">
-                <a16:creationId xmlns:a16="http://schemas.microsoft.com/office/drawing/2014/main" id="{5020B1AC-364B-4B5C-B9AF-A077AC78BC9A}"/>
+                <a16:creationId xmlns:a16="http://schemas.microsoft.com/office/drawing/2014/main" id="{DB3660C7-A811-4FED-9DB9-E26EE1B74854}"/>
               </a:ext>
             </a:extLst>
           </p:cNvPr>
@@ -4731,7 +4731,7 @@
           <p:cNvPr id="9" name="">
             <a:extLst xmlns:a="http://schemas.openxmlformats.org/drawingml/2006/main">
               <a:ext uri="{FF2B5EF4-FFF2-40B4-BE49-F238E27FC236}">
-                <a16:creationId xmlns:a16="http://schemas.microsoft.com/office/drawing/2014/main" id="{4406C736-AEF7-49F4-8810-01D4CFE184CC}"/>
+                <a16:creationId xmlns:a16="http://schemas.microsoft.com/office/drawing/2014/main" id="{78E82ED3-3972-4CF4-9B06-CBCDF6D5737D}"/>
               </a:ext>
             </a:extLst>
           </p:cNvPr>
@@ -4788,7 +4788,7 @@
           <p:cNvPr id="10" name="">
             <a:extLst xmlns:a="http://schemas.openxmlformats.org/drawingml/2006/main">
               <a:ext uri="{FF2B5EF4-FFF2-40B4-BE49-F238E27FC236}">
-                <a16:creationId xmlns:a16="http://schemas.microsoft.com/office/drawing/2014/main" id="{859E720D-0752-4DC4-A365-82B2D357BA4F}"/>
+                <a16:creationId xmlns:a16="http://schemas.microsoft.com/office/drawing/2014/main" id="{0A7D6210-B55E-488F-BB73-FF43D525BCBB}"/>
               </a:ext>
             </a:extLst>
           </p:cNvPr>
@@ -4822,7 +4822,7 @@
           <p:cNvPr id="11" name="">
             <a:extLst xmlns:a="http://schemas.openxmlformats.org/drawingml/2006/main">
               <a:ext uri="{FF2B5EF4-FFF2-40B4-BE49-F238E27FC236}">
-                <a16:creationId xmlns:a16="http://schemas.microsoft.com/office/drawing/2014/main" id="{D1D25852-1A9C-48A7-A276-5E0442834FDB}"/>
+                <a16:creationId xmlns:a16="http://schemas.microsoft.com/office/drawing/2014/main" id="{B9B0490D-5386-4CBE-963D-1D95E41C41F6}"/>
               </a:ext>
             </a:extLst>
           </p:cNvPr>
@@ -4854,7 +4854,7 @@
           <p:cNvPr id="12" name="">
             <a:extLst xmlns:a="http://schemas.openxmlformats.org/drawingml/2006/main">
               <a:ext uri="{FF2B5EF4-FFF2-40B4-BE49-F238E27FC236}">
-                <a16:creationId xmlns:a16="http://schemas.microsoft.com/office/drawing/2014/main" id="{D86F6008-F720-44DA-9DA5-68B3AB0713A9}"/>
+                <a16:creationId xmlns:a16="http://schemas.microsoft.com/office/drawing/2014/main" id="{3AED477A-1790-496A-A33B-594BB64DFC75}"/>
               </a:ext>
             </a:extLst>
           </p:cNvPr>
@@ -4911,7 +4911,7 @@
           <p:cNvPr id="13" name="">
             <a:extLst xmlns:a="http://schemas.openxmlformats.org/drawingml/2006/main">
               <a:ext uri="{FF2B5EF4-FFF2-40B4-BE49-F238E27FC236}">
-                <a16:creationId xmlns:a16="http://schemas.microsoft.com/office/drawing/2014/main" id="{3E1DC558-11CB-4B91-BBEA-817CF8E4273F}"/>
+                <a16:creationId xmlns:a16="http://schemas.microsoft.com/office/drawing/2014/main" id="{DBCF79BA-90C5-4509-A108-24951BAC0F42}"/>
               </a:ext>
             </a:extLst>
           </p:cNvPr>
@@ -4968,7 +4968,7 @@
           <p:cNvPr id="14" name="">
             <a:extLst xmlns:a="http://schemas.openxmlformats.org/drawingml/2006/main">
               <a:ext uri="{FF2B5EF4-FFF2-40B4-BE49-F238E27FC236}">
-                <a16:creationId xmlns:a16="http://schemas.microsoft.com/office/drawing/2014/main" id="{797A5FA6-E26E-42BC-BF20-9B69AE771E00}"/>
+                <a16:creationId xmlns:a16="http://schemas.microsoft.com/office/drawing/2014/main" id="{C833D8E5-B760-46C1-805A-A4696B777623}"/>
               </a:ext>
             </a:extLst>
           </p:cNvPr>
@@ -5002,7 +5002,7 @@
           <p:cNvPr id="15" name="">
             <a:extLst xmlns:a="http://schemas.openxmlformats.org/drawingml/2006/main">
               <a:ext uri="{FF2B5EF4-FFF2-40B4-BE49-F238E27FC236}">
-                <a16:creationId xmlns:a16="http://schemas.microsoft.com/office/drawing/2014/main" id="{6EB0EA91-C0C6-4398-8508-5DCC9DF39A55}"/>
+                <a16:creationId xmlns:a16="http://schemas.microsoft.com/office/drawing/2014/main" id="{752DDED6-7F7F-4DD6-94AF-45C1275014A7}"/>
               </a:ext>
             </a:extLst>
           </p:cNvPr>
@@ -5034,7 +5034,7 @@
           <p:cNvPr id="16" name="">
             <a:extLst xmlns:a="http://schemas.openxmlformats.org/drawingml/2006/main">
               <a:ext uri="{FF2B5EF4-FFF2-40B4-BE49-F238E27FC236}">
-                <a16:creationId xmlns:a16="http://schemas.microsoft.com/office/drawing/2014/main" id="{BC016EDA-00EA-47F1-A703-2CC745B52DCA}"/>
+                <a16:creationId xmlns:a16="http://schemas.microsoft.com/office/drawing/2014/main" id="{75410E94-D15D-4912-9177-ED50319296B4}"/>
               </a:ext>
             </a:extLst>
           </p:cNvPr>
@@ -5091,7 +5091,7 @@
           <p:cNvPr id="17" name="">
             <a:extLst xmlns:a="http://schemas.openxmlformats.org/drawingml/2006/main">
               <a:ext uri="{FF2B5EF4-FFF2-40B4-BE49-F238E27FC236}">
-                <a16:creationId xmlns:a16="http://schemas.microsoft.com/office/drawing/2014/main" id="{84800862-F0C8-4EDE-98E7-2BDE2969F23C}"/>
+                <a16:creationId xmlns:a16="http://schemas.microsoft.com/office/drawing/2014/main" id="{0D4F9E87-7B3E-4BE3-9031-8F77EE6C256C}"/>
               </a:ext>
             </a:extLst>
           </p:cNvPr>
@@ -5148,7 +5148,7 @@
           <p:cNvPr id="18" name="">
             <a:extLst xmlns:a="http://schemas.openxmlformats.org/drawingml/2006/main">
               <a:ext uri="{FF2B5EF4-FFF2-40B4-BE49-F238E27FC236}">
-                <a16:creationId xmlns:a16="http://schemas.microsoft.com/office/drawing/2014/main" id="{0966156D-77FD-4818-9BD4-AC580505AC63}"/>
+                <a16:creationId xmlns:a16="http://schemas.microsoft.com/office/drawing/2014/main" id="{CF05487F-4EDE-4B5D-B67A-E239EA1B0561}"/>
               </a:ext>
             </a:extLst>
           </p:cNvPr>
@@ -5182,7 +5182,7 @@
           <p:cNvPr id="19" name="">
             <a:extLst xmlns:a="http://schemas.openxmlformats.org/drawingml/2006/main">
               <a:ext uri="{FF2B5EF4-FFF2-40B4-BE49-F238E27FC236}">
-                <a16:creationId xmlns:a16="http://schemas.microsoft.com/office/drawing/2014/main" id="{38D7FDE1-AB10-4812-B569-166495D50274}"/>
+                <a16:creationId xmlns:a16="http://schemas.microsoft.com/office/drawing/2014/main" id="{DBC831EA-85D7-4C6C-A7E1-C4CC5D93BC6D}"/>
               </a:ext>
             </a:extLst>
           </p:cNvPr>
@@ -5214,7 +5214,7 @@
           <p:cNvPr id="20" name="">
             <a:extLst xmlns:a="http://schemas.openxmlformats.org/drawingml/2006/main">
               <a:ext uri="{FF2B5EF4-FFF2-40B4-BE49-F238E27FC236}">
-                <a16:creationId xmlns:a16="http://schemas.microsoft.com/office/drawing/2014/main" id="{3FA594D8-8E67-42E8-BE23-BCC067EF547F}"/>
+                <a16:creationId xmlns:a16="http://schemas.microsoft.com/office/drawing/2014/main" id="{D2D7EAA9-A1EC-498F-B4E5-031B4B0BC84D}"/>
               </a:ext>
             </a:extLst>
           </p:cNvPr>
@@ -5271,7 +5271,7 @@
           <p:cNvPr id="21" name="">
             <a:extLst xmlns:a="http://schemas.openxmlformats.org/drawingml/2006/main">
               <a:ext uri="{FF2B5EF4-FFF2-40B4-BE49-F238E27FC236}">
-                <a16:creationId xmlns:a16="http://schemas.microsoft.com/office/drawing/2014/main" id="{9CF096B3-5507-4DF3-AD20-FDBA2A14F6E3}"/>
+                <a16:creationId xmlns:a16="http://schemas.microsoft.com/office/drawing/2014/main" id="{B55998ED-7A19-48F7-8049-DA19C5D1BAAF}"/>
               </a:ext>
             </a:extLst>
           </p:cNvPr>
@@ -5328,7 +5328,7 @@
           <p:cNvPr id="22" name="">
             <a:extLst xmlns:a="http://schemas.openxmlformats.org/drawingml/2006/main">
               <a:ext uri="{FF2B5EF4-FFF2-40B4-BE49-F238E27FC236}">
-                <a16:creationId xmlns:a16="http://schemas.microsoft.com/office/drawing/2014/main" id="{A9C55768-CE23-424E-A9D2-1EF0132C812F}"/>
+                <a16:creationId xmlns:a16="http://schemas.microsoft.com/office/drawing/2014/main" id="{97FDE9FD-317D-4CA3-A4D7-0C258841BC90}"/>
               </a:ext>
             </a:extLst>
           </p:cNvPr>
@@ -5383,7 +5383,7 @@
     </p:spTree>
     <p:extLst>
       <p:ext uri="{BB962C8B-B14F-4D97-AF65-F5344CB8AC3E}">
-        <p14:creationId xmlns:p14="http://schemas.microsoft.com/office/powerpoint/2010/main" val="210184812"/>
+        <p14:creationId xmlns:p14="http://schemas.microsoft.com/office/powerpoint/2010/main" val="1008100429"/>
       </p:ext>
     </p:extLst>
   </p:cSld>
@@ -5584,7 +5584,7 @@
           <p:cNvPr id="23" name="">
             <a:extLst xmlns:a="http://schemas.openxmlformats.org/drawingml/2006/main">
               <a:ext uri="{FF2B5EF4-FFF2-40B4-BE49-F238E27FC236}">
-                <a16:creationId xmlns:a16="http://schemas.microsoft.com/office/drawing/2014/main" id="{0090742A-9A6D-4E6D-8CDE-7A7D8D315F56}"/>
+                <a16:creationId xmlns:a16="http://schemas.microsoft.com/office/drawing/2014/main" id="{A1FFEB4F-9F46-47EF-BF71-9B29517BEC97}"/>
               </a:ext>
             </a:extLst>
           </p:cNvPr>
@@ -5616,7 +5616,7 @@
           <p:cNvPr id="2" name="">
             <a:extLst xmlns:a="http://schemas.openxmlformats.org/drawingml/2006/main">
               <a:ext uri="{FF2B5EF4-FFF2-40B4-BE49-F238E27FC236}">
-                <a16:creationId xmlns:a16="http://schemas.microsoft.com/office/drawing/2014/main" id="{B97D02AB-848F-44FE-AE9E-94C79C4A3FD7}"/>
+                <a16:creationId xmlns:a16="http://schemas.microsoft.com/office/drawing/2014/main" id="{6A091233-FC27-4C78-8D73-11A762471E42}"/>
               </a:ext>
             </a:extLst>
           </p:cNvPr>
@@ -5673,7 +5673,7 @@
           <p:cNvPr id="3" name="">
             <a:extLst xmlns:a="http://schemas.openxmlformats.org/drawingml/2006/main">
               <a:ext uri="{FF2B5EF4-FFF2-40B4-BE49-F238E27FC236}">
-                <a16:creationId xmlns:a16="http://schemas.microsoft.com/office/drawing/2014/main" id="{466B5FDE-E8E2-4586-996E-9EDC6BC9200A}"/>
+                <a16:creationId xmlns:a16="http://schemas.microsoft.com/office/drawing/2014/main" id="{1DFED919-1A5B-4F22-AE84-8842A7111E6E}"/>
               </a:ext>
             </a:extLst>
           </p:cNvPr>
@@ -5705,7 +5705,7 @@
           <p:cNvPr id="4" name="">
             <a:extLst xmlns:a="http://schemas.openxmlformats.org/drawingml/2006/main">
               <a:ext uri="{FF2B5EF4-FFF2-40B4-BE49-F238E27FC236}">
-                <a16:creationId xmlns:a16="http://schemas.microsoft.com/office/drawing/2014/main" id="{0DD17498-0DBA-4D14-AAA9-12B4F63DA4A5}"/>
+                <a16:creationId xmlns:a16="http://schemas.microsoft.com/office/drawing/2014/main" id="{CDDF1214-D750-47CF-A2B2-A894BF52856D}"/>
               </a:ext>
             </a:extLst>
           </p:cNvPr>
@@ -5762,7 +5762,7 @@
           <p:cNvPr id="5" name="">
             <a:extLst xmlns:a="http://schemas.openxmlformats.org/drawingml/2006/main">
               <a:ext uri="{FF2B5EF4-FFF2-40B4-BE49-F238E27FC236}">
-                <a16:creationId xmlns:a16="http://schemas.microsoft.com/office/drawing/2014/main" id="{07EB6332-9330-40AE-9CB1-CD468DBA0374}"/>
+                <a16:creationId xmlns:a16="http://schemas.microsoft.com/office/drawing/2014/main" id="{B6069F19-0527-4E58-AA4A-8956BCA82DD9}"/>
               </a:ext>
             </a:extLst>
           </p:cNvPr>
@@ -5819,7 +5819,7 @@
           <p:cNvPr id="6" name="">
             <a:extLst xmlns:a="http://schemas.openxmlformats.org/drawingml/2006/main">
               <a:ext uri="{FF2B5EF4-FFF2-40B4-BE49-F238E27FC236}">
-                <a16:creationId xmlns:a16="http://schemas.microsoft.com/office/drawing/2014/main" id="{E5313B55-8CC9-4A9B-92D3-3801E5C2C4C5}"/>
+                <a16:creationId xmlns:a16="http://schemas.microsoft.com/office/drawing/2014/main" id="{34C74A94-B975-425E-B132-A6D52ACB9F04}"/>
               </a:ext>
             </a:extLst>
           </p:cNvPr>
@@ -5876,7 +5876,7 @@
           <p:cNvPr id="7" name="">
             <a:extLst xmlns:a="http://schemas.openxmlformats.org/drawingml/2006/main">
               <a:ext uri="{FF2B5EF4-FFF2-40B4-BE49-F238E27FC236}">
-                <a16:creationId xmlns:a16="http://schemas.microsoft.com/office/drawing/2014/main" id="{E5D35DB6-46C5-47E5-ACC3-F7B5A81779A3}"/>
+                <a16:creationId xmlns:a16="http://schemas.microsoft.com/office/drawing/2014/main" id="{7E5676FA-0916-4EAB-A9ED-D97E457D36DE}"/>
               </a:ext>
             </a:extLst>
           </p:cNvPr>
@@ -5908,7 +5908,7 @@
           <p:cNvPr id="8" name="">
             <a:extLst xmlns:a="http://schemas.openxmlformats.org/drawingml/2006/main">
               <a:ext uri="{FF2B5EF4-FFF2-40B4-BE49-F238E27FC236}">
-                <a16:creationId xmlns:a16="http://schemas.microsoft.com/office/drawing/2014/main" id="{6FC7BBF2-C33C-439C-8E4E-011BDEA22105}"/>
+                <a16:creationId xmlns:a16="http://schemas.microsoft.com/office/drawing/2014/main" id="{E4ED5437-4E36-4E69-91DC-AFBC065B05FB}"/>
               </a:ext>
             </a:extLst>
           </p:cNvPr>
@@ -5965,7 +5965,7 @@
           <p:cNvPr id="9" name="">
             <a:extLst xmlns:a="http://schemas.openxmlformats.org/drawingml/2006/main">
               <a:ext uri="{FF2B5EF4-FFF2-40B4-BE49-F238E27FC236}">
-                <a16:creationId xmlns:a16="http://schemas.microsoft.com/office/drawing/2014/main" id="{41E833FB-A30D-44A1-9648-CE9518764F52}"/>
+                <a16:creationId xmlns:a16="http://schemas.microsoft.com/office/drawing/2014/main" id="{64EBC275-3DD0-4071-AA57-140F16B631B5}"/>
               </a:ext>
             </a:extLst>
           </p:cNvPr>
@@ -6022,7 +6022,7 @@
           <p:cNvPr id="10" name="">
             <a:extLst xmlns:a="http://schemas.openxmlformats.org/drawingml/2006/main">
               <a:ext uri="{FF2B5EF4-FFF2-40B4-BE49-F238E27FC236}">
-                <a16:creationId xmlns:a16="http://schemas.microsoft.com/office/drawing/2014/main" id="{D8E74955-7614-4328-88A9-014176BC1AAF}"/>
+                <a16:creationId xmlns:a16="http://schemas.microsoft.com/office/drawing/2014/main" id="{464C5EF8-81E5-42B5-A4A4-7DC03F9AC9AB}"/>
               </a:ext>
             </a:extLst>
           </p:cNvPr>
@@ -6056,7 +6056,7 @@
           <p:cNvPr id="11" name="">
             <a:extLst xmlns:a="http://schemas.openxmlformats.org/drawingml/2006/main">
               <a:ext uri="{FF2B5EF4-FFF2-40B4-BE49-F238E27FC236}">
-                <a16:creationId xmlns:a16="http://schemas.microsoft.com/office/drawing/2014/main" id="{6FB0AFD3-119B-4F60-B59E-6E32C67623F6}"/>
+                <a16:creationId xmlns:a16="http://schemas.microsoft.com/office/drawing/2014/main" id="{6FC8745E-1D61-4DB4-9C5A-4CCB2BA465EC}"/>
               </a:ext>
             </a:extLst>
           </p:cNvPr>
@@ -6088,7 +6088,7 @@
           <p:cNvPr id="12" name="">
             <a:extLst xmlns:a="http://schemas.openxmlformats.org/drawingml/2006/main">
               <a:ext uri="{FF2B5EF4-FFF2-40B4-BE49-F238E27FC236}">
-                <a16:creationId xmlns:a16="http://schemas.microsoft.com/office/drawing/2014/main" id="{727D2E00-6847-4FC1-AA2A-B5AD83E90BB5}"/>
+                <a16:creationId xmlns:a16="http://schemas.microsoft.com/office/drawing/2014/main" id="{96261343-216E-4B5E-8FE1-18E3F6688176}"/>
               </a:ext>
             </a:extLst>
           </p:cNvPr>
@@ -6145,7 +6145,7 @@
           <p:cNvPr id="13" name="">
             <a:extLst xmlns:a="http://schemas.openxmlformats.org/drawingml/2006/main">
               <a:ext uri="{FF2B5EF4-FFF2-40B4-BE49-F238E27FC236}">
-                <a16:creationId xmlns:a16="http://schemas.microsoft.com/office/drawing/2014/main" id="{17E16E73-EFCD-48F4-A2DE-C25965160E52}"/>
+                <a16:creationId xmlns:a16="http://schemas.microsoft.com/office/drawing/2014/main" id="{CAD00067-F99C-4053-876D-4D09920C1F3F}"/>
               </a:ext>
             </a:extLst>
           </p:cNvPr>
@@ -6202,7 +6202,7 @@
           <p:cNvPr id="14" name="">
             <a:extLst xmlns:a="http://schemas.openxmlformats.org/drawingml/2006/main">
               <a:ext uri="{FF2B5EF4-FFF2-40B4-BE49-F238E27FC236}">
-                <a16:creationId xmlns:a16="http://schemas.microsoft.com/office/drawing/2014/main" id="{76781168-CC4F-44BE-83C3-BA39DEC28236}"/>
+                <a16:creationId xmlns:a16="http://schemas.microsoft.com/office/drawing/2014/main" id="{F0749415-5CDF-42A4-B6C9-593E7C91B71F}"/>
               </a:ext>
             </a:extLst>
           </p:cNvPr>
@@ -6236,7 +6236,7 @@
           <p:cNvPr id="15" name="">
             <a:extLst xmlns:a="http://schemas.openxmlformats.org/drawingml/2006/main">
               <a:ext uri="{FF2B5EF4-FFF2-40B4-BE49-F238E27FC236}">
-                <a16:creationId xmlns:a16="http://schemas.microsoft.com/office/drawing/2014/main" id="{47E0C70A-577C-465F-A167-CCB94FCE8402}"/>
+                <a16:creationId xmlns:a16="http://schemas.microsoft.com/office/drawing/2014/main" id="{B6BEC947-7CFE-49E0-89E9-9078BDF4CAE0}"/>
               </a:ext>
             </a:extLst>
           </p:cNvPr>
@@ -6268,7 +6268,7 @@
           <p:cNvPr id="16" name="">
             <a:extLst xmlns:a="http://schemas.openxmlformats.org/drawingml/2006/main">
               <a:ext uri="{FF2B5EF4-FFF2-40B4-BE49-F238E27FC236}">
-                <a16:creationId xmlns:a16="http://schemas.microsoft.com/office/drawing/2014/main" id="{788F7D57-C110-402E-93B0-DE1AB4EF4803}"/>
+                <a16:creationId xmlns:a16="http://schemas.microsoft.com/office/drawing/2014/main" id="{75820663-54FD-48C0-8365-6297FDB01782}"/>
               </a:ext>
             </a:extLst>
           </p:cNvPr>
@@ -6325,7 +6325,7 @@
           <p:cNvPr id="17" name="">
             <a:extLst xmlns:a="http://schemas.openxmlformats.org/drawingml/2006/main">
               <a:ext uri="{FF2B5EF4-FFF2-40B4-BE49-F238E27FC236}">
-                <a16:creationId xmlns:a16="http://schemas.microsoft.com/office/drawing/2014/main" id="{C06F09D6-B915-4E8E-B77B-020BF3A7C32F}"/>
+                <a16:creationId xmlns:a16="http://schemas.microsoft.com/office/drawing/2014/main" id="{39AD82CE-4801-4A65-BAF7-824EAF578BD1}"/>
               </a:ext>
             </a:extLst>
           </p:cNvPr>
@@ -6382,7 +6382,7 @@
           <p:cNvPr id="18" name="">
             <a:extLst xmlns:a="http://schemas.openxmlformats.org/drawingml/2006/main">
               <a:ext uri="{FF2B5EF4-FFF2-40B4-BE49-F238E27FC236}">
-                <a16:creationId xmlns:a16="http://schemas.microsoft.com/office/drawing/2014/main" id="{D61518D6-7DE0-4FFB-A056-EE753DAE93E1}"/>
+                <a16:creationId xmlns:a16="http://schemas.microsoft.com/office/drawing/2014/main" id="{F76BADF7-2A88-4DD8-89AF-00FFEA18B0C4}"/>
               </a:ext>
             </a:extLst>
           </p:cNvPr>
@@ -6416,7 +6416,7 @@
           <p:cNvPr id="19" name="">
             <a:extLst xmlns:a="http://schemas.openxmlformats.org/drawingml/2006/main">
               <a:ext uri="{FF2B5EF4-FFF2-40B4-BE49-F238E27FC236}">
-                <a16:creationId xmlns:a16="http://schemas.microsoft.com/office/drawing/2014/main" id="{1A04129B-C05B-4BE2-B21A-BE0DC56F35DE}"/>
+                <a16:creationId xmlns:a16="http://schemas.microsoft.com/office/drawing/2014/main" id="{9DDB19AE-6875-4B7A-8A45-D17444547C59}"/>
               </a:ext>
             </a:extLst>
           </p:cNvPr>
@@ -6448,7 +6448,7 @@
           <p:cNvPr id="20" name="">
             <a:extLst xmlns:a="http://schemas.openxmlformats.org/drawingml/2006/main">
               <a:ext uri="{FF2B5EF4-FFF2-40B4-BE49-F238E27FC236}">
-                <a16:creationId xmlns:a16="http://schemas.microsoft.com/office/drawing/2014/main" id="{66F910CF-7F3B-40EA-AA55-E4424EC1B3C1}"/>
+                <a16:creationId xmlns:a16="http://schemas.microsoft.com/office/drawing/2014/main" id="{CD33736E-05FF-4F7B-8317-31E93787B839}"/>
               </a:ext>
             </a:extLst>
           </p:cNvPr>
@@ -6505,7 +6505,7 @@
           <p:cNvPr id="21" name="">
             <a:extLst xmlns:a="http://schemas.openxmlformats.org/drawingml/2006/main">
               <a:ext uri="{FF2B5EF4-FFF2-40B4-BE49-F238E27FC236}">
-                <a16:creationId xmlns:a16="http://schemas.microsoft.com/office/drawing/2014/main" id="{E12B1A1B-DB31-46A6-BEAF-997414D5DB7F}"/>
+                <a16:creationId xmlns:a16="http://schemas.microsoft.com/office/drawing/2014/main" id="{E551D8F9-143C-49F8-8874-BB90C81A7E06}"/>
               </a:ext>
             </a:extLst>
           </p:cNvPr>
@@ -6562,7 +6562,7 @@
           <p:cNvPr id="22" name="">
             <a:extLst xmlns:a="http://schemas.openxmlformats.org/drawingml/2006/main">
               <a:ext uri="{FF2B5EF4-FFF2-40B4-BE49-F238E27FC236}">
-                <a16:creationId xmlns:a16="http://schemas.microsoft.com/office/drawing/2014/main" id="{FD2A5A9D-4B47-404E-B613-28BA1B2EE68D}"/>
+                <a16:creationId xmlns:a16="http://schemas.microsoft.com/office/drawing/2014/main" id="{B417885B-0551-4706-8823-0DA86989D870}"/>
               </a:ext>
             </a:extLst>
           </p:cNvPr>
@@ -6617,7 +6617,7 @@
     </p:spTree>
     <p:extLst>
       <p:ext uri="{BB962C8B-B14F-4D97-AF65-F5344CB8AC3E}">
-        <p14:creationId xmlns:p14="http://schemas.microsoft.com/office/powerpoint/2010/main" val="920385797"/>
+        <p14:creationId xmlns:p14="http://schemas.microsoft.com/office/powerpoint/2010/main" val="1206024075"/>
       </p:ext>
     </p:extLst>
   </p:cSld>
@@ -6818,7 +6818,7 @@
           <p:cNvPr id="16" name="">
             <a:extLst xmlns:a="http://schemas.openxmlformats.org/drawingml/2006/main">
               <a:ext uri="{FF2B5EF4-FFF2-40B4-BE49-F238E27FC236}">
-                <a16:creationId xmlns:a16="http://schemas.microsoft.com/office/drawing/2014/main" id="{CBA3582D-558C-4B8A-893D-10C1C7C6559A}"/>
+                <a16:creationId xmlns:a16="http://schemas.microsoft.com/office/drawing/2014/main" id="{7F4B27E6-3527-44F5-811A-894561D6B4D2}"/>
               </a:ext>
             </a:extLst>
           </p:cNvPr>
@@ -6850,7 +6850,7 @@
           <p:cNvPr id="2" name="">
             <a:extLst xmlns:a="http://schemas.openxmlformats.org/drawingml/2006/main">
               <a:ext uri="{FF2B5EF4-FFF2-40B4-BE49-F238E27FC236}">
-                <a16:creationId xmlns:a16="http://schemas.microsoft.com/office/drawing/2014/main" id="{124FFE8E-D5E6-4466-A962-035894F33A7A}"/>
+                <a16:creationId xmlns:a16="http://schemas.microsoft.com/office/drawing/2014/main" id="{A54663E2-6865-46F7-8AFF-361ED624F954}"/>
               </a:ext>
             </a:extLst>
           </p:cNvPr>
@@ -6907,7 +6907,7 @@
           <p:cNvPr id="3" name="">
             <a:extLst xmlns:a="http://schemas.openxmlformats.org/drawingml/2006/main">
               <a:ext uri="{FF2B5EF4-FFF2-40B4-BE49-F238E27FC236}">
-                <a16:creationId xmlns:a16="http://schemas.microsoft.com/office/drawing/2014/main" id="{1DC5E9F6-153D-4810-BCA2-0F4F79CBB6C1}"/>
+                <a16:creationId xmlns:a16="http://schemas.microsoft.com/office/drawing/2014/main" id="{6915857E-A265-4F3D-B695-E3E71269263B}"/>
               </a:ext>
             </a:extLst>
           </p:cNvPr>
@@ -6939,7 +6939,7 @@
           <p:cNvPr id="4" name="">
             <a:extLst xmlns:a="http://schemas.openxmlformats.org/drawingml/2006/main">
               <a:ext uri="{FF2B5EF4-FFF2-40B4-BE49-F238E27FC236}">
-                <a16:creationId xmlns:a16="http://schemas.microsoft.com/office/drawing/2014/main" id="{CEA11D51-0FDD-4D23-B8C4-D65B24809B0C}"/>
+                <a16:creationId xmlns:a16="http://schemas.microsoft.com/office/drawing/2014/main" id="{D8DF0E96-A546-42E2-8419-888EA60AA0E8}"/>
               </a:ext>
             </a:extLst>
           </p:cNvPr>
@@ -6996,7 +6996,7 @@
           <p:cNvPr id="5" name="">
             <a:extLst xmlns:a="http://schemas.openxmlformats.org/drawingml/2006/main">
               <a:ext uri="{FF2B5EF4-FFF2-40B4-BE49-F238E27FC236}">
-                <a16:creationId xmlns:a16="http://schemas.microsoft.com/office/drawing/2014/main" id="{69C20958-3A41-4921-9A54-177C2052526B}"/>
+                <a16:creationId xmlns:a16="http://schemas.microsoft.com/office/drawing/2014/main" id="{F469B604-401E-4973-8466-F25A29FD5D10}"/>
               </a:ext>
             </a:extLst>
           </p:cNvPr>
@@ -7053,7 +7053,7 @@
           <p:cNvPr id="6" name="">
             <a:extLst xmlns:a="http://schemas.openxmlformats.org/drawingml/2006/main">
               <a:ext uri="{FF2B5EF4-FFF2-40B4-BE49-F238E27FC236}">
-                <a16:creationId xmlns:a16="http://schemas.microsoft.com/office/drawing/2014/main" id="{6E192279-7068-4271-93A6-0816C0D0B1CB}"/>
+                <a16:creationId xmlns:a16="http://schemas.microsoft.com/office/drawing/2014/main" id="{7D5FBA85-0B03-42CF-81B9-EC4F957B189B}"/>
               </a:ext>
             </a:extLst>
           </p:cNvPr>
@@ -7110,7 +7110,7 @@
           <p:cNvPr id="7" name="">
             <a:extLst xmlns:a="http://schemas.openxmlformats.org/drawingml/2006/main">
               <a:ext uri="{FF2B5EF4-FFF2-40B4-BE49-F238E27FC236}">
-                <a16:creationId xmlns:a16="http://schemas.microsoft.com/office/drawing/2014/main" id="{933E9026-0B22-44E7-815B-B15E660BB30B}"/>
+                <a16:creationId xmlns:a16="http://schemas.microsoft.com/office/drawing/2014/main" id="{418CE23F-8748-40D1-961E-A77FC1B532C6}"/>
               </a:ext>
             </a:extLst>
           </p:cNvPr>
@@ -7142,7 +7142,7 @@
           <p:cNvPr id="8" name="">
             <a:extLst xmlns:a="http://schemas.openxmlformats.org/drawingml/2006/main">
               <a:ext uri="{FF2B5EF4-FFF2-40B4-BE49-F238E27FC236}">
-                <a16:creationId xmlns:a16="http://schemas.microsoft.com/office/drawing/2014/main" id="{12BE324C-9FCF-4C9A-9624-F09C3C13C2EE}"/>
+                <a16:creationId xmlns:a16="http://schemas.microsoft.com/office/drawing/2014/main" id="{7908AABA-54DE-46F7-9D56-72BDD09A0A78}"/>
               </a:ext>
             </a:extLst>
           </p:cNvPr>
@@ -7199,7 +7199,7 @@
           <p:cNvPr id="9" name="">
             <a:extLst xmlns:a="http://schemas.openxmlformats.org/drawingml/2006/main">
               <a:ext uri="{FF2B5EF4-FFF2-40B4-BE49-F238E27FC236}">
-                <a16:creationId xmlns:a16="http://schemas.microsoft.com/office/drawing/2014/main" id="{4EFB9853-32F5-4293-A09E-2BE6E051DC15}"/>
+                <a16:creationId xmlns:a16="http://schemas.microsoft.com/office/drawing/2014/main" id="{F0D4DAC4-F534-4CC6-9789-1EDAE1855588}"/>
               </a:ext>
             </a:extLst>
           </p:cNvPr>
@@ -7256,7 +7256,7 @@
           <p:cNvPr id="10" name="">
             <a:extLst xmlns:a="http://schemas.openxmlformats.org/drawingml/2006/main">
               <a:ext uri="{FF2B5EF4-FFF2-40B4-BE49-F238E27FC236}">
-                <a16:creationId xmlns:a16="http://schemas.microsoft.com/office/drawing/2014/main" id="{BEEBFE4D-7987-4F35-B3BD-8E0B1DB5B975}"/>
+                <a16:creationId xmlns:a16="http://schemas.microsoft.com/office/drawing/2014/main" id="{D3C4A033-DD2E-4C9F-BD69-EAA1ED63F3C7}"/>
               </a:ext>
             </a:extLst>
           </p:cNvPr>
@@ -7313,7 +7313,7 @@
           <p:cNvPr id="11" name="">
             <a:extLst xmlns:a="http://schemas.openxmlformats.org/drawingml/2006/main">
               <a:ext uri="{FF2B5EF4-FFF2-40B4-BE49-F238E27FC236}">
-                <a16:creationId xmlns:a16="http://schemas.microsoft.com/office/drawing/2014/main" id="{024E51A1-D46E-49AE-A58A-D1A702B20112}"/>
+                <a16:creationId xmlns:a16="http://schemas.microsoft.com/office/drawing/2014/main" id="{5DD45072-C7A8-4A03-A78C-575F541E27F7}"/>
               </a:ext>
             </a:extLst>
           </p:cNvPr>
@@ -7345,7 +7345,7 @@
           <p:cNvPr id="12" name="">
             <a:extLst xmlns:a="http://schemas.openxmlformats.org/drawingml/2006/main">
               <a:ext uri="{FF2B5EF4-FFF2-40B4-BE49-F238E27FC236}">
-                <a16:creationId xmlns:a16="http://schemas.microsoft.com/office/drawing/2014/main" id="{0D365106-9C71-4E2E-8E4F-C5C9AACF0DA2}"/>
+                <a16:creationId xmlns:a16="http://schemas.microsoft.com/office/drawing/2014/main" id="{B96DA48D-0F4A-45EF-B235-38F4A5D79F44}"/>
               </a:ext>
             </a:extLst>
           </p:cNvPr>
@@ -7402,7 +7402,7 @@
           <p:cNvPr id="13" name="">
             <a:extLst xmlns:a="http://schemas.openxmlformats.org/drawingml/2006/main">
               <a:ext uri="{FF2B5EF4-FFF2-40B4-BE49-F238E27FC236}">
-                <a16:creationId xmlns:a16="http://schemas.microsoft.com/office/drawing/2014/main" id="{984B17C5-C0DC-424D-B47C-5DE749A5A868}"/>
+                <a16:creationId xmlns:a16="http://schemas.microsoft.com/office/drawing/2014/main" id="{2BCC4D3F-B714-4FBE-92B5-641782DEA8DA}"/>
               </a:ext>
             </a:extLst>
           </p:cNvPr>
@@ -7459,7 +7459,7 @@
           <p:cNvPr id="14" name="">
             <a:extLst xmlns:a="http://schemas.openxmlformats.org/drawingml/2006/main">
               <a:ext uri="{FF2B5EF4-FFF2-40B4-BE49-F238E27FC236}">
-                <a16:creationId xmlns:a16="http://schemas.microsoft.com/office/drawing/2014/main" id="{FDEF7673-0B93-4BCF-80DF-B674B435C06D}"/>
+                <a16:creationId xmlns:a16="http://schemas.microsoft.com/office/drawing/2014/main" id="{3EAD6F11-AF0D-43FF-95CC-ACA5E52BCC24}"/>
               </a:ext>
             </a:extLst>
           </p:cNvPr>
@@ -7516,7 +7516,7 @@
           <p:cNvPr id="15" name="">
             <a:extLst xmlns:a="http://schemas.openxmlformats.org/drawingml/2006/main">
               <a:ext uri="{FF2B5EF4-FFF2-40B4-BE49-F238E27FC236}">
-                <a16:creationId xmlns:a16="http://schemas.microsoft.com/office/drawing/2014/main" id="{B564AACA-8371-4AF4-8BE3-74C0F3E0C44B}"/>
+                <a16:creationId xmlns:a16="http://schemas.microsoft.com/office/drawing/2014/main" id="{6ABD82C3-D555-42A5-BA60-B68679305294}"/>
               </a:ext>
             </a:extLst>
           </p:cNvPr>
@@ -7571,7 +7571,7 @@
     </p:spTree>
     <p:extLst>
       <p:ext uri="{BB962C8B-B14F-4D97-AF65-F5344CB8AC3E}">
-        <p14:creationId xmlns:p14="http://schemas.microsoft.com/office/powerpoint/2010/main" val="526903465"/>
+        <p14:creationId xmlns:p14="http://schemas.microsoft.com/office/powerpoint/2010/main" val="1278349482"/>
       </p:ext>
     </p:extLst>
   </p:cSld>
@@ -7769,10 +7769,10 @@
       </p:grpSpPr>
       <p:sp>
         <p:nvSpPr>
-          <p:cNvPr id="23" name="">
-            <a:extLst xmlns:a="http://schemas.openxmlformats.org/drawingml/2006/main">
-              <a:ext uri="{FF2B5EF4-FFF2-40B4-BE49-F238E27FC236}">
-                <a16:creationId xmlns:a16="http://schemas.microsoft.com/office/drawing/2014/main" id="{1D6DB445-1C13-49FC-B616-32A7794078E1}"/>
+          <p:cNvPr id="26" name="">
+            <a:extLst xmlns:a="http://schemas.openxmlformats.org/drawingml/2006/main">
+              <a:ext uri="{FF2B5EF4-FFF2-40B4-BE49-F238E27FC236}">
+                <a16:creationId xmlns:a16="http://schemas.microsoft.com/office/drawing/2014/main" id="{EE0D69ED-DCA6-4968-9D39-8BA393B32D21}"/>
               </a:ext>
             </a:extLst>
           </p:cNvPr>
@@ -7804,7 +7804,7 @@
           <p:cNvPr id="2" name="">
             <a:extLst xmlns:a="http://schemas.openxmlformats.org/drawingml/2006/main">
               <a:ext uri="{FF2B5EF4-FFF2-40B4-BE49-F238E27FC236}">
-                <a16:creationId xmlns:a16="http://schemas.microsoft.com/office/drawing/2014/main" id="{E4A20B44-05F8-4097-9989-D872E25F2697}"/>
+                <a16:creationId xmlns:a16="http://schemas.microsoft.com/office/drawing/2014/main" id="{072902F2-8781-446E-ADE7-A3917246313D}"/>
               </a:ext>
             </a:extLst>
           </p:cNvPr>
@@ -7861,7 +7861,7 @@
           <p:cNvPr id="3" name="">
             <a:extLst xmlns:a="http://schemas.openxmlformats.org/drawingml/2006/main">
               <a:ext uri="{FF2B5EF4-FFF2-40B4-BE49-F238E27FC236}">
-                <a16:creationId xmlns:a16="http://schemas.microsoft.com/office/drawing/2014/main" id="{B70B4A82-0FAB-4686-9EC8-0E513B6C4762}"/>
+                <a16:creationId xmlns:a16="http://schemas.microsoft.com/office/drawing/2014/main" id="{E2CB3426-2308-468C-A418-F5B6B95EDE62}"/>
               </a:ext>
             </a:extLst>
           </p:cNvPr>
@@ -7893,7 +7893,7 @@
           <p:cNvPr id="4" name="">
             <a:extLst xmlns:a="http://schemas.openxmlformats.org/drawingml/2006/main">
               <a:ext uri="{FF2B5EF4-FFF2-40B4-BE49-F238E27FC236}">
-                <a16:creationId xmlns:a16="http://schemas.microsoft.com/office/drawing/2014/main" id="{2EA4ADE8-78EC-4797-A402-9FA3571CB2DD}"/>
+                <a16:creationId xmlns:a16="http://schemas.microsoft.com/office/drawing/2014/main" id="{43FDD1BE-8354-40E9-9C08-AD822FC3FB9A}"/>
               </a:ext>
             </a:extLst>
           </p:cNvPr>
@@ -7950,7 +7950,7 @@
           <p:cNvPr id="5" name="">
             <a:extLst xmlns:a="http://schemas.openxmlformats.org/drawingml/2006/main">
               <a:ext uri="{FF2B5EF4-FFF2-40B4-BE49-F238E27FC236}">
-                <a16:creationId xmlns:a16="http://schemas.microsoft.com/office/drawing/2014/main" id="{69A5E17B-285F-43A7-A620-7B7F349576C7}"/>
+                <a16:creationId xmlns:a16="http://schemas.microsoft.com/office/drawing/2014/main" id="{1FB09E2B-2C0E-4820-9D46-BEA65757E602}"/>
               </a:ext>
             </a:extLst>
           </p:cNvPr>
@@ -8007,7 +8007,7 @@
           <p:cNvPr id="6" name="">
             <a:extLst xmlns:a="http://schemas.openxmlformats.org/drawingml/2006/main">
               <a:ext uri="{FF2B5EF4-FFF2-40B4-BE49-F238E27FC236}">
-                <a16:creationId xmlns:a16="http://schemas.microsoft.com/office/drawing/2014/main" id="{C0A2BD29-0A16-44B4-807A-2F0D8CBCB8BE}"/>
+                <a16:creationId xmlns:a16="http://schemas.microsoft.com/office/drawing/2014/main" id="{ADEBBFDF-FAAB-42E7-9375-B129F2C965CF}"/>
               </a:ext>
             </a:extLst>
           </p:cNvPr>
@@ -8064,7 +8064,7 @@
           <p:cNvPr id="7" name="">
             <a:extLst xmlns:a="http://schemas.openxmlformats.org/drawingml/2006/main">
               <a:ext uri="{FF2B5EF4-FFF2-40B4-BE49-F238E27FC236}">
-                <a16:creationId xmlns:a16="http://schemas.microsoft.com/office/drawing/2014/main" id="{18386479-484F-4051-8867-1E0EB9E5DA2B}"/>
+                <a16:creationId xmlns:a16="http://schemas.microsoft.com/office/drawing/2014/main" id="{02AD264C-E394-4C45-ACD2-76CA9AC442E8}"/>
               </a:ext>
             </a:extLst>
           </p:cNvPr>
@@ -8096,7 +8096,7 @@
           <p:cNvPr id="8" name="">
             <a:extLst xmlns:a="http://schemas.openxmlformats.org/drawingml/2006/main">
               <a:ext uri="{FF2B5EF4-FFF2-40B4-BE49-F238E27FC236}">
-                <a16:creationId xmlns:a16="http://schemas.microsoft.com/office/drawing/2014/main" id="{9422663B-5726-4C19-B63F-34ED1D9C6761}"/>
+                <a16:creationId xmlns:a16="http://schemas.microsoft.com/office/drawing/2014/main" id="{A404BA4C-052B-48E4-BEFF-7BB04C32501F}"/>
               </a:ext>
             </a:extLst>
           </p:cNvPr>
@@ -8153,7 +8153,7 @@
           <p:cNvPr id="9" name="">
             <a:extLst xmlns:a="http://schemas.openxmlformats.org/drawingml/2006/main">
               <a:ext uri="{FF2B5EF4-FFF2-40B4-BE49-F238E27FC236}">
-                <a16:creationId xmlns:a16="http://schemas.microsoft.com/office/drawing/2014/main" id="{E1861954-03A2-48BD-A1B9-CCB2E48D73F0}"/>
+                <a16:creationId xmlns:a16="http://schemas.microsoft.com/office/drawing/2014/main" id="{22B9364E-D0DC-4F36-859A-F6202417BC7A}"/>
               </a:ext>
             </a:extLst>
           </p:cNvPr>
@@ -8210,19 +8210,19 @@
           <p:cNvPr id="10" name="">
             <a:extLst xmlns:a="http://schemas.openxmlformats.org/drawingml/2006/main">
               <a:ext uri="{FF2B5EF4-FFF2-40B4-BE49-F238E27FC236}">
-                <a16:creationId xmlns:a16="http://schemas.microsoft.com/office/drawing/2014/main" id="{2DC6DD78-8094-456E-8740-021FECA62C5E}"/>
-              </a:ext>
-            </a:extLst>
-          </p:cNvPr>
-          <p:cNvSpPr>
-            <a:spLocks xmlns:a="http://schemas.openxmlformats.org/drawingml/2006/main" noGrp="1"/>
-          </p:cNvSpPr>
-          <p:nvPr/>
-        </p:nvSpPr>
-        <p:spPr>
-          <a:xfrm xmlns:a="http://schemas.openxmlformats.org/drawingml/2006/main">
-            <a:off x="914400" y="1257300"/>
-            <a:ext cx="10363200" cy="781050"/>
+                <a16:creationId xmlns:a16="http://schemas.microsoft.com/office/drawing/2014/main" id="{CF547D01-F662-4F8C-B478-3BB651E5207A}"/>
+              </a:ext>
+            </a:extLst>
+          </p:cNvPr>
+          <p:cNvSpPr>
+            <a:spLocks xmlns:a="http://schemas.openxmlformats.org/drawingml/2006/main" noGrp="1"/>
+          </p:cNvSpPr>
+          <p:nvPr/>
+        </p:nvSpPr>
+        <p:spPr>
+          <a:xfrm xmlns:a="http://schemas.openxmlformats.org/drawingml/2006/main">
+            <a:off x="857250" y="1219200"/>
+            <a:ext cx="10477500" cy="742950"/>
           </a:xfrm>
           <a:prstGeom xmlns:a="http://schemas.openxmlformats.org/drawingml/2006/main" prst="rect">
             <a:avLst/>
@@ -8239,7 +8239,7 @@
           <a:lstStyle xmlns:a="http://schemas.openxmlformats.org/drawingml/2006/main"/>
           <a:p xmlns:a="http://schemas.openxmlformats.org/drawingml/2006/main">
             <a:pPr algn="ctr">
-              <a:defRPr sz="2175" b="1">
+              <a:defRPr sz="2100" b="1">
                 <a:solidFill>
                   <a:srgbClr val="17253A"/>
                 </a:solidFill>
@@ -8249,7 +8249,7 @@
               </a:defRPr>
             </a:pPr>
             <a:r>
-              <a:rPr sz="2175" b="1">
+              <a:rPr sz="2100" b="1">
                 <a:solidFill>
                   <a:srgbClr val="17253A"/>
                 </a:solidFill>
@@ -8267,28 +8267,30 @@
           <p:cNvPr id="11" name="">
             <a:extLst xmlns:a="http://schemas.openxmlformats.org/drawingml/2006/main">
               <a:ext uri="{FF2B5EF4-FFF2-40B4-BE49-F238E27FC236}">
-                <a16:creationId xmlns:a16="http://schemas.microsoft.com/office/drawing/2014/main" id="{2BACDD3B-E540-446E-BBE9-F273086F402E}"/>
-              </a:ext>
-            </a:extLst>
-          </p:cNvPr>
-          <p:cNvSpPr>
-            <a:spLocks xmlns:a="http://schemas.openxmlformats.org/drawingml/2006/main" noGrp="1"/>
-          </p:cNvSpPr>
-          <p:nvPr/>
-        </p:nvSpPr>
-        <p:spPr>
-          <a:xfrm xmlns:a="http://schemas.openxmlformats.org/drawingml/2006/main">
-            <a:off x="1000125" y="2247900"/>
-            <a:ext cx="476250" cy="476250"/>
-          </a:xfrm>
-          <a:prstGeom xmlns:a="http://schemas.openxmlformats.org/drawingml/2006/main" prst="ellipse">
+                <a16:creationId xmlns:a16="http://schemas.microsoft.com/office/drawing/2014/main" id="{3B00D831-A302-4DD9-A0F3-F3B68EC195C4}"/>
+              </a:ext>
+            </a:extLst>
+          </p:cNvPr>
+          <p:cNvSpPr>
+            <a:spLocks xmlns:a="http://schemas.openxmlformats.org/drawingml/2006/main" noGrp="1"/>
+          </p:cNvSpPr>
+          <p:nvPr/>
+        </p:nvSpPr>
+        <p:spPr>
+          <a:xfrm xmlns:a="http://schemas.openxmlformats.org/drawingml/2006/main">
+            <a:off x="971550" y="2124075"/>
+            <a:ext cx="38100" cy="3524250"/>
+          </a:xfrm>
+          <a:prstGeom xmlns:a="http://schemas.openxmlformats.org/drawingml/2006/main" prst="rect">
             <a:avLst/>
           </a:prstGeom>
           <a:solidFill xmlns:a="http://schemas.openxmlformats.org/drawingml/2006/main">
-            <a:srgbClr val="18324A"/>
+            <a:srgbClr val="2C6E73"/>
           </a:solidFill>
           <a:ln xmlns:a="http://schemas.openxmlformats.org/drawingml/2006/main" w="0">
-            <a:noFill/>
+            <a:solidFill>
+              <a:srgbClr val="2C6E73"/>
+            </a:solidFill>
           </a:ln>
         </p:spPr>
       </p:sp>
@@ -8297,19 +8299,19 @@
           <p:cNvPr id="12" name="">
             <a:extLst xmlns:a="http://schemas.openxmlformats.org/drawingml/2006/main">
               <a:ext uri="{FF2B5EF4-FFF2-40B4-BE49-F238E27FC236}">
-                <a16:creationId xmlns:a16="http://schemas.microsoft.com/office/drawing/2014/main" id="{6D31B5AC-765C-4185-A827-B881AEFBEAF1}"/>
-              </a:ext>
-            </a:extLst>
-          </p:cNvPr>
-          <p:cNvSpPr>
-            <a:spLocks xmlns:a="http://schemas.openxmlformats.org/drawingml/2006/main" noGrp="1"/>
-          </p:cNvSpPr>
-          <p:nvPr/>
-        </p:nvSpPr>
-        <p:spPr>
-          <a:xfrm xmlns:a="http://schemas.openxmlformats.org/drawingml/2006/main">
-            <a:off x="1000125" y="2276475"/>
-            <a:ext cx="476250" cy="419100"/>
+                <a16:creationId xmlns:a16="http://schemas.microsoft.com/office/drawing/2014/main" id="{0A56013B-4D76-48FB-8697-24ABC5A885BB}"/>
+              </a:ext>
+            </a:extLst>
+          </p:cNvPr>
+          <p:cNvSpPr>
+            <a:spLocks xmlns:a="http://schemas.openxmlformats.org/drawingml/2006/main" noGrp="1"/>
+          </p:cNvSpPr>
+          <p:nvPr/>
+        </p:nvSpPr>
+        <p:spPr>
+          <a:xfrm xmlns:a="http://schemas.openxmlformats.org/drawingml/2006/main">
+            <a:off x="1162050" y="2200275"/>
+            <a:ext cx="400050" cy="400050"/>
           </a:xfrm>
           <a:prstGeom xmlns:a="http://schemas.openxmlformats.org/drawingml/2006/main" prst="rect">
             <a:avLst/>
@@ -8326,9 +8328,9 @@
           <a:lstStyle xmlns:a="http://schemas.openxmlformats.org/drawingml/2006/main"/>
           <a:p xmlns:a="http://schemas.openxmlformats.org/drawingml/2006/main">
             <a:pPr algn="ctr">
-              <a:defRPr sz="1350" b="1">
-                <a:solidFill>
-                  <a:srgbClr val="FFFFFF"/>
+              <a:defRPr sz="1125" b="1">
+                <a:solidFill>
+                  <a:srgbClr val="2C6E73"/>
                 </a:solidFill>
                 <a:latin typeface="Arial"/>
                 <a:ea typeface="Arial"/>
@@ -8336,9 +8338,9 @@
               </a:defRPr>
             </a:pPr>
             <a:r>
-              <a:rPr sz="1350" b="1">
-                <a:solidFill>
-                  <a:srgbClr val="FFFFFF"/>
+              <a:rPr sz="1125" b="1">
+                <a:solidFill>
+                  <a:srgbClr val="2C6E73"/>
                 </a:solidFill>
                 <a:latin typeface="Arial"/>
                 <a:ea typeface="Arial"/>
@@ -8354,19 +8356,19 @@
           <p:cNvPr id="13" name="">
             <a:extLst xmlns:a="http://schemas.openxmlformats.org/drawingml/2006/main">
               <a:ext uri="{FF2B5EF4-FFF2-40B4-BE49-F238E27FC236}">
-                <a16:creationId xmlns:a16="http://schemas.microsoft.com/office/drawing/2014/main" id="{AF7CD18B-E81C-4200-B17F-C8C28BB1A4B7}"/>
-              </a:ext>
-            </a:extLst>
-          </p:cNvPr>
-          <p:cNvSpPr>
-            <a:spLocks xmlns:a="http://schemas.openxmlformats.org/drawingml/2006/main" noGrp="1"/>
-          </p:cNvSpPr>
-          <p:nvPr/>
-        </p:nvSpPr>
-        <p:spPr>
-          <a:xfrm xmlns:a="http://schemas.openxmlformats.org/drawingml/2006/main">
-            <a:off x="1714500" y="2181225"/>
-            <a:ext cx="9429750" cy="609600"/>
+                <a16:creationId xmlns:a16="http://schemas.microsoft.com/office/drawing/2014/main" id="{A75B08E3-5F6B-46BD-8F55-F0546EC70383}"/>
+              </a:ext>
+            </a:extLst>
+          </p:cNvPr>
+          <p:cNvSpPr>
+            <a:spLocks xmlns:a="http://schemas.openxmlformats.org/drawingml/2006/main" noGrp="1"/>
+          </p:cNvSpPr>
+          <p:nvPr/>
+        </p:nvSpPr>
+        <p:spPr>
+          <a:xfrm xmlns:a="http://schemas.openxmlformats.org/drawingml/2006/main">
+            <a:off x="1714500" y="2114550"/>
+            <a:ext cx="9525000" cy="638175"/>
           </a:xfrm>
           <a:prstGeom xmlns:a="http://schemas.openxmlformats.org/drawingml/2006/main" prst="rect">
             <a:avLst/>
@@ -8383,7 +8385,7 @@
           <a:lstStyle xmlns:a="http://schemas.openxmlformats.org/drawingml/2006/main"/>
           <a:p xmlns:a="http://schemas.openxmlformats.org/drawingml/2006/main">
             <a:pPr algn="l">
-              <a:defRPr sz="1500" b="0">
+              <a:defRPr sz="1575" b="0">
                 <a:solidFill>
                   <a:srgbClr val="17253A"/>
                 </a:solidFill>
@@ -8393,7 +8395,7 @@
               </a:defRPr>
             </a:pPr>
             <a:r>
-              <a:rPr sz="1500" b="0">
+              <a:rPr sz="1575" b="0">
                 <a:solidFill>
                   <a:srgbClr val="17253A"/>
                 </a:solidFill>
@@ -8401,7 +8403,7 @@
                 <a:ea typeface="Arial"/>
                 <a:cs typeface="Arial"/>
               </a:rPr>
-              <a:t>Identify the structure: State whether the task concerns factors or multiples.</a:t>
+              <a:t>1 × 72 = 72</a:t>
             </a:r>
           </a:p>
         </p:txBody>
@@ -8411,28 +8413,30 @@
           <p:cNvPr id="14" name="">
             <a:extLst xmlns:a="http://schemas.openxmlformats.org/drawingml/2006/main">
               <a:ext uri="{FF2B5EF4-FFF2-40B4-BE49-F238E27FC236}">
-                <a16:creationId xmlns:a16="http://schemas.microsoft.com/office/drawing/2014/main" id="{943FDECD-D3B2-4704-B8F2-28315FC97E07}"/>
-              </a:ext>
-            </a:extLst>
-          </p:cNvPr>
-          <p:cNvSpPr>
-            <a:spLocks xmlns:a="http://schemas.openxmlformats.org/drawingml/2006/main" noGrp="1"/>
-          </p:cNvSpPr>
-          <p:nvPr/>
-        </p:nvSpPr>
-        <p:spPr>
-          <a:xfrm xmlns:a="http://schemas.openxmlformats.org/drawingml/2006/main">
-            <a:off x="1000125" y="2990850"/>
-            <a:ext cx="476250" cy="476250"/>
-          </a:xfrm>
-          <a:prstGeom xmlns:a="http://schemas.openxmlformats.org/drawingml/2006/main" prst="ellipse">
+                <a16:creationId xmlns:a16="http://schemas.microsoft.com/office/drawing/2014/main" id="{95964630-0334-4EAE-A3BA-BB291E8F24FB}"/>
+              </a:ext>
+            </a:extLst>
+          </p:cNvPr>
+          <p:cNvSpPr>
+            <a:spLocks xmlns:a="http://schemas.openxmlformats.org/drawingml/2006/main" noGrp="1"/>
+          </p:cNvSpPr>
+          <p:nvPr/>
+        </p:nvSpPr>
+        <p:spPr>
+          <a:xfrm xmlns:a="http://schemas.openxmlformats.org/drawingml/2006/main">
+            <a:off x="1714500" y="2771775"/>
+            <a:ext cx="9334500" cy="9525"/>
+          </a:xfrm>
+          <a:prstGeom xmlns:a="http://schemas.openxmlformats.org/drawingml/2006/main" prst="rect">
             <a:avLst/>
           </a:prstGeom>
           <a:solidFill xmlns:a="http://schemas.openxmlformats.org/drawingml/2006/main">
-            <a:srgbClr val="2C6E73"/>
+            <a:srgbClr val="D9E0E6"/>
           </a:solidFill>
           <a:ln xmlns:a="http://schemas.openxmlformats.org/drawingml/2006/main" w="0">
-            <a:noFill/>
+            <a:solidFill>
+              <a:srgbClr val="D9E0E6"/>
+            </a:solidFill>
           </a:ln>
         </p:spPr>
       </p:sp>
@@ -8441,19 +8445,19 @@
           <p:cNvPr id="15" name="">
             <a:extLst xmlns:a="http://schemas.openxmlformats.org/drawingml/2006/main">
               <a:ext uri="{FF2B5EF4-FFF2-40B4-BE49-F238E27FC236}">
-                <a16:creationId xmlns:a16="http://schemas.microsoft.com/office/drawing/2014/main" id="{32A979EC-81F3-49BC-AE55-A7F278F5B51F}"/>
-              </a:ext>
-            </a:extLst>
-          </p:cNvPr>
-          <p:cNvSpPr>
-            <a:spLocks xmlns:a="http://schemas.openxmlformats.org/drawingml/2006/main" noGrp="1"/>
-          </p:cNvSpPr>
-          <p:nvPr/>
-        </p:nvSpPr>
-        <p:spPr>
-          <a:xfrm xmlns:a="http://schemas.openxmlformats.org/drawingml/2006/main">
-            <a:off x="1000125" y="3019425"/>
-            <a:ext cx="476250" cy="419100"/>
+                <a16:creationId xmlns:a16="http://schemas.microsoft.com/office/drawing/2014/main" id="{9EA98D2E-C3E3-4522-BF70-DF9DB9648415}"/>
+              </a:ext>
+            </a:extLst>
+          </p:cNvPr>
+          <p:cNvSpPr>
+            <a:spLocks xmlns:a="http://schemas.openxmlformats.org/drawingml/2006/main" noGrp="1"/>
+          </p:cNvSpPr>
+          <p:nvPr/>
+        </p:nvSpPr>
+        <p:spPr>
+          <a:xfrm xmlns:a="http://schemas.openxmlformats.org/drawingml/2006/main">
+            <a:off x="1162050" y="2905125"/>
+            <a:ext cx="400050" cy="400050"/>
           </a:xfrm>
           <a:prstGeom xmlns:a="http://schemas.openxmlformats.org/drawingml/2006/main" prst="rect">
             <a:avLst/>
@@ -8470,9 +8474,9 @@
           <a:lstStyle xmlns:a="http://schemas.openxmlformats.org/drawingml/2006/main"/>
           <a:p xmlns:a="http://schemas.openxmlformats.org/drawingml/2006/main">
             <a:pPr algn="ctr">
-              <a:defRPr sz="1350" b="1">
-                <a:solidFill>
-                  <a:srgbClr val="FFFFFF"/>
+              <a:defRPr sz="1125" b="1">
+                <a:solidFill>
+                  <a:srgbClr val="2C6E73"/>
                 </a:solidFill>
                 <a:latin typeface="Arial"/>
                 <a:ea typeface="Arial"/>
@@ -8480,9 +8484,9 @@
               </a:defRPr>
             </a:pPr>
             <a:r>
-              <a:rPr sz="1350" b="1">
-                <a:solidFill>
-                  <a:srgbClr val="FFFFFF"/>
+              <a:rPr sz="1125" b="1">
+                <a:solidFill>
+                  <a:srgbClr val="2C6E73"/>
                 </a:solidFill>
                 <a:latin typeface="Arial"/>
                 <a:ea typeface="Arial"/>
@@ -8498,19 +8502,19 @@
           <p:cNvPr id="16" name="">
             <a:extLst xmlns:a="http://schemas.openxmlformats.org/drawingml/2006/main">
               <a:ext uri="{FF2B5EF4-FFF2-40B4-BE49-F238E27FC236}">
-                <a16:creationId xmlns:a16="http://schemas.microsoft.com/office/drawing/2014/main" id="{0A007736-2BA5-400C-8850-92DB684E8165}"/>
-              </a:ext>
-            </a:extLst>
-          </p:cNvPr>
-          <p:cNvSpPr>
-            <a:spLocks xmlns:a="http://schemas.openxmlformats.org/drawingml/2006/main" noGrp="1"/>
-          </p:cNvSpPr>
-          <p:nvPr/>
-        </p:nvSpPr>
-        <p:spPr>
-          <a:xfrm xmlns:a="http://schemas.openxmlformats.org/drawingml/2006/main">
-            <a:off x="1714500" y="2924175"/>
-            <a:ext cx="9429750" cy="609600"/>
+                <a16:creationId xmlns:a16="http://schemas.microsoft.com/office/drawing/2014/main" id="{23B783C5-4D46-4DBE-BD01-731A8A3A3C01}"/>
+              </a:ext>
+            </a:extLst>
+          </p:cNvPr>
+          <p:cNvSpPr>
+            <a:spLocks xmlns:a="http://schemas.openxmlformats.org/drawingml/2006/main" noGrp="1"/>
+          </p:cNvSpPr>
+          <p:nvPr/>
+        </p:nvSpPr>
+        <p:spPr>
+          <a:xfrm xmlns:a="http://schemas.openxmlformats.org/drawingml/2006/main">
+            <a:off x="1714500" y="2819400"/>
+            <a:ext cx="9525000" cy="638175"/>
           </a:xfrm>
           <a:prstGeom xmlns:a="http://schemas.openxmlformats.org/drawingml/2006/main" prst="rect">
             <a:avLst/>
@@ -8527,7 +8531,7 @@
           <a:lstStyle xmlns:a="http://schemas.openxmlformats.org/drawingml/2006/main"/>
           <a:p xmlns:a="http://schemas.openxmlformats.org/drawingml/2006/main">
             <a:pPr algn="l">
-              <a:defRPr sz="1500" b="0">
+              <a:defRPr sz="1575" b="0">
                 <a:solidFill>
                   <a:srgbClr val="17253A"/>
                 </a:solidFill>
@@ -8537,7 +8541,7 @@
               </a:defRPr>
             </a:pPr>
             <a:r>
-              <a:rPr sz="1500" b="0">
+              <a:rPr sz="1575" b="0">
                 <a:solidFill>
                   <a:srgbClr val="17253A"/>
                 </a:solidFill>
@@ -8545,7 +8549,7 @@
                 <a:ea typeface="Arial"/>
                 <a:cs typeface="Arial"/>
               </a:rPr>
-              <a:t>Set up the method: Work systematically from the smallest possible factor or multiple.</a:t>
+              <a:t>2 × 36 = 72</a:t>
             </a:r>
           </a:p>
         </p:txBody>
@@ -8555,28 +8559,30 @@
           <p:cNvPr id="17" name="">
             <a:extLst xmlns:a="http://schemas.openxmlformats.org/drawingml/2006/main">
               <a:ext uri="{FF2B5EF4-FFF2-40B4-BE49-F238E27FC236}">
-                <a16:creationId xmlns:a16="http://schemas.microsoft.com/office/drawing/2014/main" id="{9307DE62-88F1-42BD-B0CE-BB6FB8F6D645}"/>
-              </a:ext>
-            </a:extLst>
-          </p:cNvPr>
-          <p:cNvSpPr>
-            <a:spLocks xmlns:a="http://schemas.openxmlformats.org/drawingml/2006/main" noGrp="1"/>
-          </p:cNvSpPr>
-          <p:nvPr/>
-        </p:nvSpPr>
-        <p:spPr>
-          <a:xfrm xmlns:a="http://schemas.openxmlformats.org/drawingml/2006/main">
-            <a:off x="1000125" y="3733800"/>
-            <a:ext cx="476250" cy="476250"/>
-          </a:xfrm>
-          <a:prstGeom xmlns:a="http://schemas.openxmlformats.org/drawingml/2006/main" prst="ellipse">
+                <a16:creationId xmlns:a16="http://schemas.microsoft.com/office/drawing/2014/main" id="{6BF5AB1B-2488-415F-932A-6637C01D1792}"/>
+              </a:ext>
+            </a:extLst>
+          </p:cNvPr>
+          <p:cNvSpPr>
+            <a:spLocks xmlns:a="http://schemas.openxmlformats.org/drawingml/2006/main" noGrp="1"/>
+          </p:cNvSpPr>
+          <p:nvPr/>
+        </p:nvSpPr>
+        <p:spPr>
+          <a:xfrm xmlns:a="http://schemas.openxmlformats.org/drawingml/2006/main">
+            <a:off x="1714500" y="3476625"/>
+            <a:ext cx="9334500" cy="9525"/>
+          </a:xfrm>
+          <a:prstGeom xmlns:a="http://schemas.openxmlformats.org/drawingml/2006/main" prst="rect">
             <a:avLst/>
           </a:prstGeom>
           <a:solidFill xmlns:a="http://schemas.openxmlformats.org/drawingml/2006/main">
-            <a:srgbClr val="2C6E73"/>
+            <a:srgbClr val="D9E0E6"/>
           </a:solidFill>
           <a:ln xmlns:a="http://schemas.openxmlformats.org/drawingml/2006/main" w="0">
-            <a:noFill/>
+            <a:solidFill>
+              <a:srgbClr val="D9E0E6"/>
+            </a:solidFill>
           </a:ln>
         </p:spPr>
       </p:sp>
@@ -8585,19 +8591,19 @@
           <p:cNvPr id="18" name="">
             <a:extLst xmlns:a="http://schemas.openxmlformats.org/drawingml/2006/main">
               <a:ext uri="{FF2B5EF4-FFF2-40B4-BE49-F238E27FC236}">
-                <a16:creationId xmlns:a16="http://schemas.microsoft.com/office/drawing/2014/main" id="{7F7F1B26-B059-48F4-A506-5763200C6FBD}"/>
-              </a:ext>
-            </a:extLst>
-          </p:cNvPr>
-          <p:cNvSpPr>
-            <a:spLocks xmlns:a="http://schemas.openxmlformats.org/drawingml/2006/main" noGrp="1"/>
-          </p:cNvSpPr>
-          <p:nvPr/>
-        </p:nvSpPr>
-        <p:spPr>
-          <a:xfrm xmlns:a="http://schemas.openxmlformats.org/drawingml/2006/main">
-            <a:off x="1000125" y="3762375"/>
-            <a:ext cx="476250" cy="419100"/>
+                <a16:creationId xmlns:a16="http://schemas.microsoft.com/office/drawing/2014/main" id="{89C4CE19-4D4C-4B29-AEDA-C1B6D15AB76F}"/>
+              </a:ext>
+            </a:extLst>
+          </p:cNvPr>
+          <p:cNvSpPr>
+            <a:spLocks xmlns:a="http://schemas.openxmlformats.org/drawingml/2006/main" noGrp="1"/>
+          </p:cNvSpPr>
+          <p:nvPr/>
+        </p:nvSpPr>
+        <p:spPr>
+          <a:xfrm xmlns:a="http://schemas.openxmlformats.org/drawingml/2006/main">
+            <a:off x="1162050" y="3609975"/>
+            <a:ext cx="400050" cy="400050"/>
           </a:xfrm>
           <a:prstGeom xmlns:a="http://schemas.openxmlformats.org/drawingml/2006/main" prst="rect">
             <a:avLst/>
@@ -8614,9 +8620,9 @@
           <a:lstStyle xmlns:a="http://schemas.openxmlformats.org/drawingml/2006/main"/>
           <a:p xmlns:a="http://schemas.openxmlformats.org/drawingml/2006/main">
             <a:pPr algn="ctr">
-              <a:defRPr sz="1350" b="1">
-                <a:solidFill>
-                  <a:srgbClr val="FFFFFF"/>
+              <a:defRPr sz="1125" b="1">
+                <a:solidFill>
+                  <a:srgbClr val="2C6E73"/>
                 </a:solidFill>
                 <a:latin typeface="Arial"/>
                 <a:ea typeface="Arial"/>
@@ -8624,9 +8630,9 @@
               </a:defRPr>
             </a:pPr>
             <a:r>
-              <a:rPr sz="1350" b="1">
-                <a:solidFill>
-                  <a:srgbClr val="FFFFFF"/>
+              <a:rPr sz="1125" b="1">
+                <a:solidFill>
+                  <a:srgbClr val="2C6E73"/>
                 </a:solidFill>
                 <a:latin typeface="Arial"/>
                 <a:ea typeface="Arial"/>
@@ -8642,19 +8648,19 @@
           <p:cNvPr id="19" name="">
             <a:extLst xmlns:a="http://schemas.openxmlformats.org/drawingml/2006/main">
               <a:ext uri="{FF2B5EF4-FFF2-40B4-BE49-F238E27FC236}">
-                <a16:creationId xmlns:a16="http://schemas.microsoft.com/office/drawing/2014/main" id="{67E4EDE6-2731-4940-A491-6D9DE1401105}"/>
-              </a:ext>
-            </a:extLst>
-          </p:cNvPr>
-          <p:cNvSpPr>
-            <a:spLocks xmlns:a="http://schemas.openxmlformats.org/drawingml/2006/main" noGrp="1"/>
-          </p:cNvSpPr>
-          <p:nvPr/>
-        </p:nvSpPr>
-        <p:spPr>
-          <a:xfrm xmlns:a="http://schemas.openxmlformats.org/drawingml/2006/main">
-            <a:off x="1714500" y="3667125"/>
-            <a:ext cx="9429750" cy="609600"/>
+                <a16:creationId xmlns:a16="http://schemas.microsoft.com/office/drawing/2014/main" id="{2FCC91D7-1104-4264-888F-17BE4AAFF11E}"/>
+              </a:ext>
+            </a:extLst>
+          </p:cNvPr>
+          <p:cNvSpPr>
+            <a:spLocks xmlns:a="http://schemas.openxmlformats.org/drawingml/2006/main" noGrp="1"/>
+          </p:cNvSpPr>
+          <p:nvPr/>
+        </p:nvSpPr>
+        <p:spPr>
+          <a:xfrm xmlns:a="http://schemas.openxmlformats.org/drawingml/2006/main">
+            <a:off x="1714500" y="3524250"/>
+            <a:ext cx="9525000" cy="638175"/>
           </a:xfrm>
           <a:prstGeom xmlns:a="http://schemas.openxmlformats.org/drawingml/2006/main" prst="rect">
             <a:avLst/>
@@ -8671,7 +8677,7 @@
           <a:lstStyle xmlns:a="http://schemas.openxmlformats.org/drawingml/2006/main"/>
           <a:p xmlns:a="http://schemas.openxmlformats.org/drawingml/2006/main">
             <a:pPr algn="l">
-              <a:defRPr sz="1500" b="0">
+              <a:defRPr sz="1575" b="0">
                 <a:solidFill>
                   <a:srgbClr val="17253A"/>
                 </a:solidFill>
@@ -8681,7 +8687,7 @@
               </a:defRPr>
             </a:pPr>
             <a:r>
-              <a:rPr sz="1500" b="0">
+              <a:rPr sz="1575" b="0">
                 <a:solidFill>
                   <a:srgbClr val="17253A"/>
                 </a:solidFill>
@@ -8689,7 +8695,7 @@
                 <a:ea typeface="Arial"/>
                 <a:cs typeface="Arial"/>
               </a:rPr>
-              <a:t>Complete the calculation: 1 and 72; 2 and 36; 3 and 24; 4 and 18; 6 and 12; 8 and 9.</a:t>
+              <a:t>3 × 24 = 72     4 × 18 = 72</a:t>
             </a:r>
           </a:p>
         </p:txBody>
@@ -8699,28 +8705,30 @@
           <p:cNvPr id="20" name="">
             <a:extLst xmlns:a="http://schemas.openxmlformats.org/drawingml/2006/main">
               <a:ext uri="{FF2B5EF4-FFF2-40B4-BE49-F238E27FC236}">
-                <a16:creationId xmlns:a16="http://schemas.microsoft.com/office/drawing/2014/main" id="{6049E97B-4942-4FB9-B882-4CC2E2B5788C}"/>
-              </a:ext>
-            </a:extLst>
-          </p:cNvPr>
-          <p:cNvSpPr>
-            <a:spLocks xmlns:a="http://schemas.openxmlformats.org/drawingml/2006/main" noGrp="1"/>
-          </p:cNvSpPr>
-          <p:nvPr/>
-        </p:nvSpPr>
-        <p:spPr>
-          <a:xfrm xmlns:a="http://schemas.openxmlformats.org/drawingml/2006/main">
-            <a:off x="1000125" y="4476750"/>
-            <a:ext cx="476250" cy="476250"/>
-          </a:xfrm>
-          <a:prstGeom xmlns:a="http://schemas.openxmlformats.org/drawingml/2006/main" prst="ellipse">
+                <a16:creationId xmlns:a16="http://schemas.microsoft.com/office/drawing/2014/main" id="{7F82122D-2E5B-4934-8BE4-AB8FAF9B5D43}"/>
+              </a:ext>
+            </a:extLst>
+          </p:cNvPr>
+          <p:cNvSpPr>
+            <a:spLocks xmlns:a="http://schemas.openxmlformats.org/drawingml/2006/main" noGrp="1"/>
+          </p:cNvSpPr>
+          <p:nvPr/>
+        </p:nvSpPr>
+        <p:spPr>
+          <a:xfrm xmlns:a="http://schemas.openxmlformats.org/drawingml/2006/main">
+            <a:off x="1714500" y="4181475"/>
+            <a:ext cx="9334500" cy="9525"/>
+          </a:xfrm>
+          <a:prstGeom xmlns:a="http://schemas.openxmlformats.org/drawingml/2006/main" prst="rect">
             <a:avLst/>
           </a:prstGeom>
           <a:solidFill xmlns:a="http://schemas.openxmlformats.org/drawingml/2006/main">
-            <a:srgbClr val="2C6E73"/>
+            <a:srgbClr val="D9E0E6"/>
           </a:solidFill>
           <a:ln xmlns:a="http://schemas.openxmlformats.org/drawingml/2006/main" w="0">
-            <a:noFill/>
+            <a:solidFill>
+              <a:srgbClr val="D9E0E6"/>
+            </a:solidFill>
           </a:ln>
         </p:spPr>
       </p:sp>
@@ -8729,19 +8737,19 @@
           <p:cNvPr id="21" name="">
             <a:extLst xmlns:a="http://schemas.openxmlformats.org/drawingml/2006/main">
               <a:ext uri="{FF2B5EF4-FFF2-40B4-BE49-F238E27FC236}">
-                <a16:creationId xmlns:a16="http://schemas.microsoft.com/office/drawing/2014/main" id="{7548E857-03F8-4E91-8E7B-78DCC1E338E5}"/>
-              </a:ext>
-            </a:extLst>
-          </p:cNvPr>
-          <p:cNvSpPr>
-            <a:spLocks xmlns:a="http://schemas.openxmlformats.org/drawingml/2006/main" noGrp="1"/>
-          </p:cNvSpPr>
-          <p:nvPr/>
-        </p:nvSpPr>
-        <p:spPr>
-          <a:xfrm xmlns:a="http://schemas.openxmlformats.org/drawingml/2006/main">
-            <a:off x="1000125" y="4505325"/>
-            <a:ext cx="476250" cy="419100"/>
+                <a16:creationId xmlns:a16="http://schemas.microsoft.com/office/drawing/2014/main" id="{3B3DF2DE-49DC-4392-835F-6D997BF3805B}"/>
+              </a:ext>
+            </a:extLst>
+          </p:cNvPr>
+          <p:cNvSpPr>
+            <a:spLocks xmlns:a="http://schemas.openxmlformats.org/drawingml/2006/main" noGrp="1"/>
+          </p:cNvSpPr>
+          <p:nvPr/>
+        </p:nvSpPr>
+        <p:spPr>
+          <a:xfrm xmlns:a="http://schemas.openxmlformats.org/drawingml/2006/main">
+            <a:off x="1162050" y="4314825"/>
+            <a:ext cx="400050" cy="400050"/>
           </a:xfrm>
           <a:prstGeom xmlns:a="http://schemas.openxmlformats.org/drawingml/2006/main" prst="rect">
             <a:avLst/>
@@ -8758,9 +8766,9 @@
           <a:lstStyle xmlns:a="http://schemas.openxmlformats.org/drawingml/2006/main"/>
           <a:p xmlns:a="http://schemas.openxmlformats.org/drawingml/2006/main">
             <a:pPr algn="ctr">
-              <a:defRPr sz="1350" b="1">
-                <a:solidFill>
-                  <a:srgbClr val="FFFFFF"/>
+              <a:defRPr sz="1125" b="1">
+                <a:solidFill>
+                  <a:srgbClr val="2C6E73"/>
                 </a:solidFill>
                 <a:latin typeface="Arial"/>
                 <a:ea typeface="Arial"/>
@@ -8768,9 +8776,9 @@
               </a:defRPr>
             </a:pPr>
             <a:r>
-              <a:rPr sz="1350" b="1">
-                <a:solidFill>
-                  <a:srgbClr val="FFFFFF"/>
+              <a:rPr sz="1125" b="1">
+                <a:solidFill>
+                  <a:srgbClr val="2C6E73"/>
                 </a:solidFill>
                 <a:latin typeface="Arial"/>
                 <a:ea typeface="Arial"/>
@@ -8786,19 +8794,19 @@
           <p:cNvPr id="22" name="">
             <a:extLst xmlns:a="http://schemas.openxmlformats.org/drawingml/2006/main">
               <a:ext uri="{FF2B5EF4-FFF2-40B4-BE49-F238E27FC236}">
-                <a16:creationId xmlns:a16="http://schemas.microsoft.com/office/drawing/2014/main" id="{F80374FD-13B2-4232-A016-0C519923BE70}"/>
-              </a:ext>
-            </a:extLst>
-          </p:cNvPr>
-          <p:cNvSpPr>
-            <a:spLocks xmlns:a="http://schemas.openxmlformats.org/drawingml/2006/main" noGrp="1"/>
-          </p:cNvSpPr>
-          <p:nvPr/>
-        </p:nvSpPr>
-        <p:spPr>
-          <a:xfrm xmlns:a="http://schemas.openxmlformats.org/drawingml/2006/main">
-            <a:off x="1714500" y="4410075"/>
-            <a:ext cx="9429750" cy="609600"/>
+                <a16:creationId xmlns:a16="http://schemas.microsoft.com/office/drawing/2014/main" id="{E251E2B1-6FC9-4009-9F7C-D742B819E906}"/>
+              </a:ext>
+            </a:extLst>
+          </p:cNvPr>
+          <p:cNvSpPr>
+            <a:spLocks xmlns:a="http://schemas.openxmlformats.org/drawingml/2006/main" noGrp="1"/>
+          </p:cNvSpPr>
+          <p:nvPr/>
+        </p:nvSpPr>
+        <p:spPr>
+          <a:xfrm xmlns:a="http://schemas.openxmlformats.org/drawingml/2006/main">
+            <a:off x="1714500" y="4229100"/>
+            <a:ext cx="9525000" cy="638175"/>
           </a:xfrm>
           <a:prstGeom xmlns:a="http://schemas.openxmlformats.org/drawingml/2006/main" prst="rect">
             <a:avLst/>
@@ -8815,9 +8823,9 @@
           <a:lstStyle xmlns:a="http://schemas.openxmlformats.org/drawingml/2006/main"/>
           <a:p xmlns:a="http://schemas.openxmlformats.org/drawingml/2006/main">
             <a:pPr algn="l">
-              <a:defRPr sz="1500" b="1">
-                <a:solidFill>
-                  <a:srgbClr val="2F785D"/>
+              <a:defRPr sz="1575" b="0">
+                <a:solidFill>
+                  <a:srgbClr val="17253A"/>
                 </a:solidFill>
                 <a:latin typeface="Arial"/>
                 <a:ea typeface="Arial"/>
@@ -8825,15 +8833,161 @@
               </a:defRPr>
             </a:pPr>
             <a:r>
-              <a:rPr sz="1500" b="1">
+              <a:rPr sz="1575" b="0">
+                <a:solidFill>
+                  <a:srgbClr val="17253A"/>
+                </a:solidFill>
+                <a:latin typeface="Arial"/>
+                <a:ea typeface="Arial"/>
+                <a:cs typeface="Arial"/>
+              </a:rPr>
+              <a:t>6 × 12 = 72     8 × 9 = 72</a:t>
+            </a:r>
+          </a:p>
+        </p:txBody>
+      </p:sp>
+      <p:sp>
+        <p:nvSpPr>
+          <p:cNvPr id="23" name="">
+            <a:extLst xmlns:a="http://schemas.openxmlformats.org/drawingml/2006/main">
+              <a:ext uri="{FF2B5EF4-FFF2-40B4-BE49-F238E27FC236}">
+                <a16:creationId xmlns:a16="http://schemas.microsoft.com/office/drawing/2014/main" id="{1A15117C-1D45-4482-A0C2-4D96B3882AAF}"/>
+              </a:ext>
+            </a:extLst>
+          </p:cNvPr>
+          <p:cNvSpPr>
+            <a:spLocks xmlns:a="http://schemas.openxmlformats.org/drawingml/2006/main" noGrp="1"/>
+          </p:cNvSpPr>
+          <p:nvPr/>
+        </p:nvSpPr>
+        <p:spPr>
+          <a:xfrm xmlns:a="http://schemas.openxmlformats.org/drawingml/2006/main">
+            <a:off x="1714500" y="4886325"/>
+            <a:ext cx="9334500" cy="9525"/>
+          </a:xfrm>
+          <a:prstGeom xmlns:a="http://schemas.openxmlformats.org/drawingml/2006/main" prst="rect">
+            <a:avLst/>
+          </a:prstGeom>
+          <a:solidFill xmlns:a="http://schemas.openxmlformats.org/drawingml/2006/main">
+            <a:srgbClr val="D9E0E6"/>
+          </a:solidFill>
+          <a:ln xmlns:a="http://schemas.openxmlformats.org/drawingml/2006/main" w="0">
+            <a:solidFill>
+              <a:srgbClr val="D9E0E6"/>
+            </a:solidFill>
+          </a:ln>
+        </p:spPr>
+      </p:sp>
+      <p:sp>
+        <p:nvSpPr>
+          <p:cNvPr id="24" name="">
+            <a:extLst xmlns:a="http://schemas.openxmlformats.org/drawingml/2006/main">
+              <a:ext uri="{FF2B5EF4-FFF2-40B4-BE49-F238E27FC236}">
+                <a16:creationId xmlns:a16="http://schemas.microsoft.com/office/drawing/2014/main" id="{50E19132-C422-49BC-A106-8F2C0F8F83C1}"/>
+              </a:ext>
+            </a:extLst>
+          </p:cNvPr>
+          <p:cNvSpPr>
+            <a:spLocks xmlns:a="http://schemas.openxmlformats.org/drawingml/2006/main" noGrp="1"/>
+          </p:cNvSpPr>
+          <p:nvPr/>
+        </p:nvSpPr>
+        <p:spPr>
+          <a:xfrm xmlns:a="http://schemas.openxmlformats.org/drawingml/2006/main">
+            <a:off x="1162050" y="5019675"/>
+            <a:ext cx="400050" cy="400050"/>
+          </a:xfrm>
+          <a:prstGeom xmlns:a="http://schemas.openxmlformats.org/drawingml/2006/main" prst="rect">
+            <a:avLst/>
+          </a:prstGeom>
+          <a:noFill xmlns:a="http://schemas.openxmlformats.org/drawingml/2006/main"/>
+          <a:ln xmlns:a="http://schemas.openxmlformats.org/drawingml/2006/main" w="0">
+            <a:noFill/>
+          </a:ln>
+        </p:spPr>
+        <p:txBody>
+          <a:bodyPr xmlns:a="http://schemas.openxmlformats.org/drawingml/2006/main" anchor="ctr">
+            <a:normAutofit fontScale="100000"/>
+          </a:bodyPr>
+          <a:lstStyle xmlns:a="http://schemas.openxmlformats.org/drawingml/2006/main"/>
+          <a:p xmlns:a="http://schemas.openxmlformats.org/drawingml/2006/main">
+            <a:pPr algn="ctr">
+              <a:defRPr sz="1125" b="1">
                 <a:solidFill>
                   <a:srgbClr val="2F785D"/>
                 </a:solidFill>
                 <a:latin typeface="Arial"/>
                 <a:ea typeface="Arial"/>
                 <a:cs typeface="Arial"/>
+              </a:defRPr>
+            </a:pPr>
+            <a:r>
+              <a:rPr sz="1125" b="1">
+                <a:solidFill>
+                  <a:srgbClr val="2F785D"/>
+                </a:solidFill>
+                <a:latin typeface="Arial"/>
+                <a:ea typeface="Arial"/>
+                <a:cs typeface="Arial"/>
               </a:rPr>
-              <a:t>Check the result: Check that the list is complete and use it to justify the conclusion.</a:t>
+              <a:t>5</a:t>
+            </a:r>
+          </a:p>
+        </p:txBody>
+      </p:sp>
+      <p:sp>
+        <p:nvSpPr>
+          <p:cNvPr id="25" name="">
+            <a:extLst xmlns:a="http://schemas.openxmlformats.org/drawingml/2006/main">
+              <a:ext uri="{FF2B5EF4-FFF2-40B4-BE49-F238E27FC236}">
+                <a16:creationId xmlns:a16="http://schemas.microsoft.com/office/drawing/2014/main" id="{F89FD5CE-E7D8-4384-9ECE-4EC09C3A4BDF}"/>
+              </a:ext>
+            </a:extLst>
+          </p:cNvPr>
+          <p:cNvSpPr>
+            <a:spLocks xmlns:a="http://schemas.openxmlformats.org/drawingml/2006/main" noGrp="1"/>
+          </p:cNvSpPr>
+          <p:nvPr/>
+        </p:nvSpPr>
+        <p:spPr>
+          <a:xfrm xmlns:a="http://schemas.openxmlformats.org/drawingml/2006/main">
+            <a:off x="1714500" y="4933950"/>
+            <a:ext cx="9525000" cy="638175"/>
+          </a:xfrm>
+          <a:prstGeom xmlns:a="http://schemas.openxmlformats.org/drawingml/2006/main" prst="rect">
+            <a:avLst/>
+          </a:prstGeom>
+          <a:noFill xmlns:a="http://schemas.openxmlformats.org/drawingml/2006/main"/>
+          <a:ln xmlns:a="http://schemas.openxmlformats.org/drawingml/2006/main" w="0">
+            <a:noFill/>
+          </a:ln>
+        </p:spPr>
+        <p:txBody>
+          <a:bodyPr xmlns:a="http://schemas.openxmlformats.org/drawingml/2006/main" anchor="ctr">
+            <a:normAutofit fontScale="100000"/>
+          </a:bodyPr>
+          <a:lstStyle xmlns:a="http://schemas.openxmlformats.org/drawingml/2006/main"/>
+          <a:p xmlns:a="http://schemas.openxmlformats.org/drawingml/2006/main">
+            <a:pPr algn="l">
+              <a:defRPr sz="1575" b="1">
+                <a:solidFill>
+                  <a:srgbClr val="2F785D"/>
+                </a:solidFill>
+                <a:latin typeface="Arial"/>
+                <a:ea typeface="Arial"/>
+                <a:cs typeface="Arial"/>
+              </a:defRPr>
+            </a:pPr>
+            <a:r>
+              <a:rPr sz="1575" b="1">
+                <a:solidFill>
+                  <a:srgbClr val="2F785D"/>
+                </a:solidFill>
+                <a:latin typeface="Arial"/>
+                <a:ea typeface="Arial"/>
+                <a:cs typeface="Arial"/>
+              </a:rPr>
+              <a:t>Stop after 8 × 9 because the factors would repeat</a:t>
             </a:r>
           </a:p>
         </p:txBody>
@@ -8841,7 +8995,7 @@
     </p:spTree>
     <p:extLst>
       <p:ext uri="{BB962C8B-B14F-4D97-AF65-F5344CB8AC3E}">
-        <p14:creationId xmlns:p14="http://schemas.microsoft.com/office/powerpoint/2010/main" val="1906982831"/>
+        <p14:creationId xmlns:p14="http://schemas.microsoft.com/office/powerpoint/2010/main" val="1235177604"/>
       </p:ext>
     </p:extLst>
   </p:cSld>
@@ -9078,6 +9232,51 @@
                       </p:childTnLst>
                     </p:cTn>
                   </p:par>
+                  <p:par>
+                    <p:cTn id="23" fill="hold">
+                      <p:stCondLst>
+                        <p:cond delay="indefinite"/>
+                      </p:stCondLst>
+                      <p:childTnLst>
+                        <p:par>
+                          <p:cTn id="24" fill="hold">
+                            <p:stCondLst>
+                              <p:cond delay="0"/>
+                            </p:stCondLst>
+                            <p:childTnLst>
+                              <p:par>
+                                <p:cTn id="25" presetID="1" presetClass="entr" presetSubtype="0" fill="hold" grpId="0" nodeType="clickEffect">
+                                  <p:stCondLst>
+                                    <p:cond delay="0"/>
+                                  </p:stCondLst>
+                                  <p:childTnLst>
+                                    <p:set>
+                                      <p:cBhvr>
+                                        <p:cTn id="26" dur="1" fill="hold">
+                                          <p:stCondLst>
+                                            <p:cond delay="0"/>
+                                          </p:stCondLst>
+                                        </p:cTn>
+                                        <p:tgtEl>
+                                          <p:spTgt spid="25"/>
+                                        </p:tgtEl>
+                                        <p:attrNameLst>
+                                          <p:attrName>style.visibility</p:attrName>
+                                        </p:attrNameLst>
+                                      </p:cBhvr>
+                                      <p:to>
+                                        <p:strVal val="visible"/>
+                                      </p:to>
+                                    </p:set>
+                                  </p:childTnLst>
+                                </p:cTn>
+                              </p:par>
+                            </p:childTnLst>
+                          </p:cTn>
+                        </p:par>
+                      </p:childTnLst>
+                    </p:cTn>
+                  </p:par>
                 </p:childTnLst>
               </p:cTn>
               <p:prevCondLst>
@@ -9105,6 +9304,7 @@
       <p:bldP spid="16" grpId="0"/>
       <p:bldP spid="19" grpId="0"/>
       <p:bldP spid="22" grpId="0"/>
+      <p:bldP spid="25" grpId="0"/>
     </p:bldLst>
   </p:timing>
 </p:sld>
@@ -9134,7 +9334,7 @@
           <p:cNvPr id="15" name="">
             <a:extLst xmlns:a="http://schemas.openxmlformats.org/drawingml/2006/main">
               <a:ext uri="{FF2B5EF4-FFF2-40B4-BE49-F238E27FC236}">
-                <a16:creationId xmlns:a16="http://schemas.microsoft.com/office/drawing/2014/main" id="{C527BAFE-2290-4F25-8576-C65B5721CD23}"/>
+                <a16:creationId xmlns:a16="http://schemas.microsoft.com/office/drawing/2014/main" id="{025BC7E0-32B7-4773-B0FB-36C3EEDB8636}"/>
               </a:ext>
             </a:extLst>
           </p:cNvPr>
@@ -9166,7 +9366,7 @@
           <p:cNvPr id="2" name="">
             <a:extLst xmlns:a="http://schemas.openxmlformats.org/drawingml/2006/main">
               <a:ext uri="{FF2B5EF4-FFF2-40B4-BE49-F238E27FC236}">
-                <a16:creationId xmlns:a16="http://schemas.microsoft.com/office/drawing/2014/main" id="{C3F81E30-866F-4726-88AE-8A3F59360F1D}"/>
+                <a16:creationId xmlns:a16="http://schemas.microsoft.com/office/drawing/2014/main" id="{2F743733-042F-4AB9-82E3-B9F9DEB44355}"/>
               </a:ext>
             </a:extLst>
           </p:cNvPr>
@@ -9223,7 +9423,7 @@
           <p:cNvPr id="3" name="">
             <a:extLst xmlns:a="http://schemas.openxmlformats.org/drawingml/2006/main">
               <a:ext uri="{FF2B5EF4-FFF2-40B4-BE49-F238E27FC236}">
-                <a16:creationId xmlns:a16="http://schemas.microsoft.com/office/drawing/2014/main" id="{7A457E8E-198F-417F-A414-A7066EEF02AD}"/>
+                <a16:creationId xmlns:a16="http://schemas.microsoft.com/office/drawing/2014/main" id="{531E5063-7CEB-4A4B-8CE9-703F5C9FE02C}"/>
               </a:ext>
             </a:extLst>
           </p:cNvPr>
@@ -9255,7 +9455,7 @@
           <p:cNvPr id="4" name="">
             <a:extLst xmlns:a="http://schemas.openxmlformats.org/drawingml/2006/main">
               <a:ext uri="{FF2B5EF4-FFF2-40B4-BE49-F238E27FC236}">
-                <a16:creationId xmlns:a16="http://schemas.microsoft.com/office/drawing/2014/main" id="{C5B85390-0FFB-42E9-8665-95DE26524066}"/>
+                <a16:creationId xmlns:a16="http://schemas.microsoft.com/office/drawing/2014/main" id="{CD07896A-80F7-4F70-B0BC-EFD557C36D25}"/>
               </a:ext>
             </a:extLst>
           </p:cNvPr>
@@ -9312,7 +9512,7 @@
           <p:cNvPr id="5" name="">
             <a:extLst xmlns:a="http://schemas.openxmlformats.org/drawingml/2006/main">
               <a:ext uri="{FF2B5EF4-FFF2-40B4-BE49-F238E27FC236}">
-                <a16:creationId xmlns:a16="http://schemas.microsoft.com/office/drawing/2014/main" id="{0E8A3039-A65E-48CE-AEFE-F278393B09C0}"/>
+                <a16:creationId xmlns:a16="http://schemas.microsoft.com/office/drawing/2014/main" id="{2D61F1BB-2DBC-417A-AC38-1C563682272C}"/>
               </a:ext>
             </a:extLst>
           </p:cNvPr>
@@ -9369,7 +9569,7 @@
           <p:cNvPr id="6" name="">
             <a:extLst xmlns:a="http://schemas.openxmlformats.org/drawingml/2006/main">
               <a:ext uri="{FF2B5EF4-FFF2-40B4-BE49-F238E27FC236}">
-                <a16:creationId xmlns:a16="http://schemas.microsoft.com/office/drawing/2014/main" id="{4EE2BBF8-D5FE-46A4-B11E-1E69E01B4638}"/>
+                <a16:creationId xmlns:a16="http://schemas.microsoft.com/office/drawing/2014/main" id="{383F5923-E198-4103-A3A2-99E02D2F5E09}"/>
               </a:ext>
             </a:extLst>
           </p:cNvPr>
@@ -9426,7 +9626,7 @@
           <p:cNvPr id="7" name="">
             <a:extLst xmlns:a="http://schemas.openxmlformats.org/drawingml/2006/main">
               <a:ext uri="{FF2B5EF4-FFF2-40B4-BE49-F238E27FC236}">
-                <a16:creationId xmlns:a16="http://schemas.microsoft.com/office/drawing/2014/main" id="{5D883911-3E2E-4797-9BDA-C1CA3361E804}"/>
+                <a16:creationId xmlns:a16="http://schemas.microsoft.com/office/drawing/2014/main" id="{544742F1-7504-461B-A8A6-39CAA65C1367}"/>
               </a:ext>
             </a:extLst>
           </p:cNvPr>
@@ -9458,7 +9658,7 @@
           <p:cNvPr id="8" name="">
             <a:extLst xmlns:a="http://schemas.openxmlformats.org/drawingml/2006/main">
               <a:ext uri="{FF2B5EF4-FFF2-40B4-BE49-F238E27FC236}">
-                <a16:creationId xmlns:a16="http://schemas.microsoft.com/office/drawing/2014/main" id="{B94C11A4-CA17-471D-AEB8-2C12E1AD47E8}"/>
+                <a16:creationId xmlns:a16="http://schemas.microsoft.com/office/drawing/2014/main" id="{03B801B6-E30F-4F10-853B-626F6B652107}"/>
               </a:ext>
             </a:extLst>
           </p:cNvPr>
@@ -9515,7 +9715,7 @@
           <p:cNvPr id="9" name="">
             <a:extLst xmlns:a="http://schemas.openxmlformats.org/drawingml/2006/main">
               <a:ext uri="{FF2B5EF4-FFF2-40B4-BE49-F238E27FC236}">
-                <a16:creationId xmlns:a16="http://schemas.microsoft.com/office/drawing/2014/main" id="{E5531BA9-7B0A-4B62-A1A0-0346E68F7E88}"/>
+                <a16:creationId xmlns:a16="http://schemas.microsoft.com/office/drawing/2014/main" id="{73755B53-0405-4523-BD93-75E2902304FF}"/>
               </a:ext>
             </a:extLst>
           </p:cNvPr>
@@ -9572,7 +9772,7 @@
           <p:cNvPr id="10" name="">
             <a:extLst xmlns:a="http://schemas.openxmlformats.org/drawingml/2006/main">
               <a:ext uri="{FF2B5EF4-FFF2-40B4-BE49-F238E27FC236}">
-                <a16:creationId xmlns:a16="http://schemas.microsoft.com/office/drawing/2014/main" id="{B2B8E8FB-8749-4E67-A58A-9DEF7305FEED}"/>
+                <a16:creationId xmlns:a16="http://schemas.microsoft.com/office/drawing/2014/main" id="{96CBBF00-226B-46F0-BA9F-3992D2674BAB}"/>
               </a:ext>
             </a:extLst>
           </p:cNvPr>
@@ -9629,7 +9829,7 @@
           <p:cNvPr id="11" name="">
             <a:extLst xmlns:a="http://schemas.openxmlformats.org/drawingml/2006/main">
               <a:ext uri="{FF2B5EF4-FFF2-40B4-BE49-F238E27FC236}">
-                <a16:creationId xmlns:a16="http://schemas.microsoft.com/office/drawing/2014/main" id="{1843727F-FA23-41C9-99C4-E48603CAA51A}"/>
+                <a16:creationId xmlns:a16="http://schemas.microsoft.com/office/drawing/2014/main" id="{40EF4A28-96CB-486E-9DA5-92ED8AC12757}"/>
               </a:ext>
             </a:extLst>
           </p:cNvPr>
@@ -9686,7 +9886,7 @@
           <p:cNvPr id="12" name="">
             <a:extLst xmlns:a="http://schemas.openxmlformats.org/drawingml/2006/main">
               <a:ext uri="{FF2B5EF4-FFF2-40B4-BE49-F238E27FC236}">
-                <a16:creationId xmlns:a16="http://schemas.microsoft.com/office/drawing/2014/main" id="{39C36730-9AB2-43E4-A066-3B66B8C6A24F}"/>
+                <a16:creationId xmlns:a16="http://schemas.microsoft.com/office/drawing/2014/main" id="{36AD8692-6DA3-4B02-84E9-C44C177CB339}"/>
               </a:ext>
             </a:extLst>
           </p:cNvPr>
@@ -9718,7 +9918,7 @@
           <p:cNvPr id="13" name="">
             <a:extLst xmlns:a="http://schemas.openxmlformats.org/drawingml/2006/main">
               <a:ext uri="{FF2B5EF4-FFF2-40B4-BE49-F238E27FC236}">
-                <a16:creationId xmlns:a16="http://schemas.microsoft.com/office/drawing/2014/main" id="{5EFD0441-AB76-4206-AE4D-5549948955A8}"/>
+                <a16:creationId xmlns:a16="http://schemas.microsoft.com/office/drawing/2014/main" id="{ED3F64D3-A2ED-4E87-9FAE-F2D9A884A4DB}"/>
               </a:ext>
             </a:extLst>
           </p:cNvPr>
@@ -9775,7 +9975,7 @@
           <p:cNvPr id="14" name="">
             <a:extLst xmlns:a="http://schemas.openxmlformats.org/drawingml/2006/main">
               <a:ext uri="{FF2B5EF4-FFF2-40B4-BE49-F238E27FC236}">
-                <a16:creationId xmlns:a16="http://schemas.microsoft.com/office/drawing/2014/main" id="{8B04EB0D-B64F-49F3-BDD4-B89374CA7916}"/>
+                <a16:creationId xmlns:a16="http://schemas.microsoft.com/office/drawing/2014/main" id="{33616AA2-A71E-4048-A619-2E8C2951198C}"/>
               </a:ext>
             </a:extLst>
           </p:cNvPr>
@@ -9830,7 +10030,7 @@
     </p:spTree>
     <p:extLst>
       <p:ext uri="{BB962C8B-B14F-4D97-AF65-F5344CB8AC3E}">
-        <p14:creationId xmlns:p14="http://schemas.microsoft.com/office/powerpoint/2010/main" val="936607153"/>
+        <p14:creationId xmlns:p14="http://schemas.microsoft.com/office/powerpoint/2010/main" val="586143054"/>
       </p:ext>
     </p:extLst>
   </p:cSld>
@@ -10031,7 +10231,7 @@
           <p:cNvPr id="16" name="">
             <a:extLst xmlns:a="http://schemas.openxmlformats.org/drawingml/2006/main">
               <a:ext uri="{FF2B5EF4-FFF2-40B4-BE49-F238E27FC236}">
-                <a16:creationId xmlns:a16="http://schemas.microsoft.com/office/drawing/2014/main" id="{C4E34101-E2F3-441D-98D6-7525154930C1}"/>
+                <a16:creationId xmlns:a16="http://schemas.microsoft.com/office/drawing/2014/main" id="{4C4FDE13-E343-48F4-BDF1-AFD08ABBBBD4}"/>
               </a:ext>
             </a:extLst>
           </p:cNvPr>
@@ -10063,7 +10263,7 @@
           <p:cNvPr id="2" name="">
             <a:extLst xmlns:a="http://schemas.openxmlformats.org/drawingml/2006/main">
               <a:ext uri="{FF2B5EF4-FFF2-40B4-BE49-F238E27FC236}">
-                <a16:creationId xmlns:a16="http://schemas.microsoft.com/office/drawing/2014/main" id="{B6A2DE58-4A30-4689-BD06-909A0B2F6AB5}"/>
+                <a16:creationId xmlns:a16="http://schemas.microsoft.com/office/drawing/2014/main" id="{D1C38846-0A08-414D-AD34-728434C9F331}"/>
               </a:ext>
             </a:extLst>
           </p:cNvPr>
@@ -10120,7 +10320,7 @@
           <p:cNvPr id="3" name="">
             <a:extLst xmlns:a="http://schemas.openxmlformats.org/drawingml/2006/main">
               <a:ext uri="{FF2B5EF4-FFF2-40B4-BE49-F238E27FC236}">
-                <a16:creationId xmlns:a16="http://schemas.microsoft.com/office/drawing/2014/main" id="{A22169BD-3594-4741-98D6-8C218E5DA027}"/>
+                <a16:creationId xmlns:a16="http://schemas.microsoft.com/office/drawing/2014/main" id="{2A4B1D63-13C3-4D0E-AA39-E8B907C8F2A2}"/>
               </a:ext>
             </a:extLst>
           </p:cNvPr>
@@ -10152,7 +10352,7 @@
           <p:cNvPr id="4" name="">
             <a:extLst xmlns:a="http://schemas.openxmlformats.org/drawingml/2006/main">
               <a:ext uri="{FF2B5EF4-FFF2-40B4-BE49-F238E27FC236}">
-                <a16:creationId xmlns:a16="http://schemas.microsoft.com/office/drawing/2014/main" id="{B50FFA30-DE22-4D72-8348-118AD7A0FF6A}"/>
+                <a16:creationId xmlns:a16="http://schemas.microsoft.com/office/drawing/2014/main" id="{567B67EB-8244-4905-88BF-C669ED213AE6}"/>
               </a:ext>
             </a:extLst>
           </p:cNvPr>
@@ -10209,7 +10409,7 @@
           <p:cNvPr id="5" name="">
             <a:extLst xmlns:a="http://schemas.openxmlformats.org/drawingml/2006/main">
               <a:ext uri="{FF2B5EF4-FFF2-40B4-BE49-F238E27FC236}">
-                <a16:creationId xmlns:a16="http://schemas.microsoft.com/office/drawing/2014/main" id="{AAEA00A6-D6D0-48DF-9600-F2B35FEE5EA1}"/>
+                <a16:creationId xmlns:a16="http://schemas.microsoft.com/office/drawing/2014/main" id="{A76FF47B-96D3-45D1-934A-76E1506DCA1A}"/>
               </a:ext>
             </a:extLst>
           </p:cNvPr>
@@ -10266,7 +10466,7 @@
           <p:cNvPr id="6" name="">
             <a:extLst xmlns:a="http://schemas.openxmlformats.org/drawingml/2006/main">
               <a:ext uri="{FF2B5EF4-FFF2-40B4-BE49-F238E27FC236}">
-                <a16:creationId xmlns:a16="http://schemas.microsoft.com/office/drawing/2014/main" id="{792914FD-B3F6-4FC8-B35C-A747BB4490A2}"/>
+                <a16:creationId xmlns:a16="http://schemas.microsoft.com/office/drawing/2014/main" id="{F13C5329-5725-4117-8728-7712E2825073}"/>
               </a:ext>
             </a:extLst>
           </p:cNvPr>
@@ -10323,7 +10523,7 @@
           <p:cNvPr id="7" name="">
             <a:extLst xmlns:a="http://schemas.openxmlformats.org/drawingml/2006/main">
               <a:ext uri="{FF2B5EF4-FFF2-40B4-BE49-F238E27FC236}">
-                <a16:creationId xmlns:a16="http://schemas.microsoft.com/office/drawing/2014/main" id="{F211F881-1D24-4E50-A15E-59CDD6F6987F}"/>
+                <a16:creationId xmlns:a16="http://schemas.microsoft.com/office/drawing/2014/main" id="{9839A3D7-2DD4-4C52-8001-9856D12A0A48}"/>
               </a:ext>
             </a:extLst>
           </p:cNvPr>
@@ -10355,7 +10555,7 @@
           <p:cNvPr id="8" name="">
             <a:extLst xmlns:a="http://schemas.openxmlformats.org/drawingml/2006/main">
               <a:ext uri="{FF2B5EF4-FFF2-40B4-BE49-F238E27FC236}">
-                <a16:creationId xmlns:a16="http://schemas.microsoft.com/office/drawing/2014/main" id="{57764AFD-E8CB-4CA8-875B-511361A1DD07}"/>
+                <a16:creationId xmlns:a16="http://schemas.microsoft.com/office/drawing/2014/main" id="{0CC49AC2-D69A-4D29-9DCD-8172DE66C1F5}"/>
               </a:ext>
             </a:extLst>
           </p:cNvPr>
@@ -10412,7 +10612,7 @@
           <p:cNvPr id="9" name="">
             <a:extLst xmlns:a="http://schemas.openxmlformats.org/drawingml/2006/main">
               <a:ext uri="{FF2B5EF4-FFF2-40B4-BE49-F238E27FC236}">
-                <a16:creationId xmlns:a16="http://schemas.microsoft.com/office/drawing/2014/main" id="{39BA7666-01BF-424A-BDD3-D8006F421A4A}"/>
+                <a16:creationId xmlns:a16="http://schemas.microsoft.com/office/drawing/2014/main" id="{23A5901A-797D-4A19-99DA-D9F8BF472042}"/>
               </a:ext>
             </a:extLst>
           </p:cNvPr>
@@ -10469,7 +10669,7 @@
           <p:cNvPr id="10" name="">
             <a:extLst xmlns:a="http://schemas.openxmlformats.org/drawingml/2006/main">
               <a:ext uri="{FF2B5EF4-FFF2-40B4-BE49-F238E27FC236}">
-                <a16:creationId xmlns:a16="http://schemas.microsoft.com/office/drawing/2014/main" id="{37BA7188-191A-43F8-8D8B-D9383E028897}"/>
+                <a16:creationId xmlns:a16="http://schemas.microsoft.com/office/drawing/2014/main" id="{3BD96435-4C58-4A0E-9DB7-9843E99368D8}"/>
               </a:ext>
             </a:extLst>
           </p:cNvPr>
@@ -10526,7 +10726,7 @@
           <p:cNvPr id="11" name="">
             <a:extLst xmlns:a="http://schemas.openxmlformats.org/drawingml/2006/main">
               <a:ext uri="{FF2B5EF4-FFF2-40B4-BE49-F238E27FC236}">
-                <a16:creationId xmlns:a16="http://schemas.microsoft.com/office/drawing/2014/main" id="{441D8EC5-DE3F-4814-A546-2BC3FE6E87CF}"/>
+                <a16:creationId xmlns:a16="http://schemas.microsoft.com/office/drawing/2014/main" id="{34E04868-5383-4368-B7BC-F3C6F49CA987}"/>
               </a:ext>
             </a:extLst>
           </p:cNvPr>
@@ -10583,7 +10783,7 @@
           <p:cNvPr id="12" name="">
             <a:extLst xmlns:a="http://schemas.openxmlformats.org/drawingml/2006/main">
               <a:ext uri="{FF2B5EF4-FFF2-40B4-BE49-F238E27FC236}">
-                <a16:creationId xmlns:a16="http://schemas.microsoft.com/office/drawing/2014/main" id="{7647F7AB-782A-4B3A-AAB9-67C45F17BC7A}"/>
+                <a16:creationId xmlns:a16="http://schemas.microsoft.com/office/drawing/2014/main" id="{3B7D0FFC-84C7-43A0-960A-B39CE85BB193}"/>
               </a:ext>
             </a:extLst>
           </p:cNvPr>
@@ -10640,7 +10840,7 @@
           <p:cNvPr id="13" name="">
             <a:extLst xmlns:a="http://schemas.openxmlformats.org/drawingml/2006/main">
               <a:ext uri="{FF2B5EF4-FFF2-40B4-BE49-F238E27FC236}">
-                <a16:creationId xmlns:a16="http://schemas.microsoft.com/office/drawing/2014/main" id="{CBC3D60E-3AB6-4BF5-8048-FC3955456CE2}"/>
+                <a16:creationId xmlns:a16="http://schemas.microsoft.com/office/drawing/2014/main" id="{7504E354-49F7-4661-8C65-C0F02DC5672E}"/>
               </a:ext>
             </a:extLst>
           </p:cNvPr>
@@ -10697,7 +10897,7 @@
           <p:cNvPr id="14" name="">
             <a:extLst xmlns:a="http://schemas.openxmlformats.org/drawingml/2006/main">
               <a:ext uri="{FF2B5EF4-FFF2-40B4-BE49-F238E27FC236}">
-                <a16:creationId xmlns:a16="http://schemas.microsoft.com/office/drawing/2014/main" id="{1EA0B14F-A9F3-4F3E-B379-03C9078BA596}"/>
+                <a16:creationId xmlns:a16="http://schemas.microsoft.com/office/drawing/2014/main" id="{432CC9A7-3F75-4879-AFBE-A83A58C047EB}"/>
               </a:ext>
             </a:extLst>
           </p:cNvPr>
@@ -10754,7 +10954,7 @@
           <p:cNvPr id="15" name="">
             <a:extLst xmlns:a="http://schemas.openxmlformats.org/drawingml/2006/main">
               <a:ext uri="{FF2B5EF4-FFF2-40B4-BE49-F238E27FC236}">
-                <a16:creationId xmlns:a16="http://schemas.microsoft.com/office/drawing/2014/main" id="{8435E809-AA9D-4D96-82A1-BE6EE13BF584}"/>
+                <a16:creationId xmlns:a16="http://schemas.microsoft.com/office/drawing/2014/main" id="{A4DD0A92-0C31-4A2C-952A-7C0F1D4F1A9C}"/>
               </a:ext>
             </a:extLst>
           </p:cNvPr>
@@ -10809,7 +11009,7 @@
     </p:spTree>
     <p:extLst>
       <p:ext uri="{BB962C8B-B14F-4D97-AF65-F5344CB8AC3E}">
-        <p14:creationId xmlns:p14="http://schemas.microsoft.com/office/powerpoint/2010/main" val="1710187846"/>
+        <p14:creationId xmlns:p14="http://schemas.microsoft.com/office/powerpoint/2010/main" val="588099984"/>
       </p:ext>
     </p:extLst>
   </p:cSld>
@@ -10964,7 +11164,7 @@
           <p:cNvPr id="16" name="">
             <a:extLst xmlns:a="http://schemas.openxmlformats.org/drawingml/2006/main">
               <a:ext uri="{FF2B5EF4-FFF2-40B4-BE49-F238E27FC236}">
-                <a16:creationId xmlns:a16="http://schemas.microsoft.com/office/drawing/2014/main" id="{95F4E3EB-8EC9-4631-8BA4-CE4762BD3C1C}"/>
+                <a16:creationId xmlns:a16="http://schemas.microsoft.com/office/drawing/2014/main" id="{D078D0DE-B338-4F5E-9F54-BA62F31F843B}"/>
               </a:ext>
             </a:extLst>
           </p:cNvPr>
@@ -10996,7 +11196,7 @@
           <p:cNvPr id="2" name="">
             <a:extLst xmlns:a="http://schemas.openxmlformats.org/drawingml/2006/main">
               <a:ext uri="{FF2B5EF4-FFF2-40B4-BE49-F238E27FC236}">
-                <a16:creationId xmlns:a16="http://schemas.microsoft.com/office/drawing/2014/main" id="{5FCC5D8D-DDA7-4213-A69C-30057AED38C6}"/>
+                <a16:creationId xmlns:a16="http://schemas.microsoft.com/office/drawing/2014/main" id="{01909ACE-8D29-42D5-9815-054424BA3E1F}"/>
               </a:ext>
             </a:extLst>
           </p:cNvPr>
@@ -11053,7 +11253,7 @@
           <p:cNvPr id="3" name="">
             <a:extLst xmlns:a="http://schemas.openxmlformats.org/drawingml/2006/main">
               <a:ext uri="{FF2B5EF4-FFF2-40B4-BE49-F238E27FC236}">
-                <a16:creationId xmlns:a16="http://schemas.microsoft.com/office/drawing/2014/main" id="{2BC0647E-DF33-4D7C-A8B7-6DDC86EC3B6B}"/>
+                <a16:creationId xmlns:a16="http://schemas.microsoft.com/office/drawing/2014/main" id="{378E0E3A-E05D-40FE-948C-48B9E2CDB585}"/>
               </a:ext>
             </a:extLst>
           </p:cNvPr>
@@ -11085,7 +11285,7 @@
           <p:cNvPr id="4" name="">
             <a:extLst xmlns:a="http://schemas.openxmlformats.org/drawingml/2006/main">
               <a:ext uri="{FF2B5EF4-FFF2-40B4-BE49-F238E27FC236}">
-                <a16:creationId xmlns:a16="http://schemas.microsoft.com/office/drawing/2014/main" id="{0D99DC5F-A5E5-4DF3-BEDA-8CDBC2491C42}"/>
+                <a16:creationId xmlns:a16="http://schemas.microsoft.com/office/drawing/2014/main" id="{29CA0AE6-4C9B-45FE-8981-05847B232752}"/>
               </a:ext>
             </a:extLst>
           </p:cNvPr>
@@ -11142,7 +11342,7 @@
           <p:cNvPr id="5" name="">
             <a:extLst xmlns:a="http://schemas.openxmlformats.org/drawingml/2006/main">
               <a:ext uri="{FF2B5EF4-FFF2-40B4-BE49-F238E27FC236}">
-                <a16:creationId xmlns:a16="http://schemas.microsoft.com/office/drawing/2014/main" id="{BDECCC85-8D51-4012-830B-522DD908C99A}"/>
+                <a16:creationId xmlns:a16="http://schemas.microsoft.com/office/drawing/2014/main" id="{A1AC6FA0-005C-4639-A8EF-2588C56BD19F}"/>
               </a:ext>
             </a:extLst>
           </p:cNvPr>
@@ -11199,7 +11399,7 @@
           <p:cNvPr id="6" name="">
             <a:extLst xmlns:a="http://schemas.openxmlformats.org/drawingml/2006/main">
               <a:ext uri="{FF2B5EF4-FFF2-40B4-BE49-F238E27FC236}">
-                <a16:creationId xmlns:a16="http://schemas.microsoft.com/office/drawing/2014/main" id="{0175CC2F-3547-4FD3-A551-4A207A90388E}"/>
+                <a16:creationId xmlns:a16="http://schemas.microsoft.com/office/drawing/2014/main" id="{6CB34A6A-D630-4949-9A1C-7D0C070EE4E9}"/>
               </a:ext>
             </a:extLst>
           </p:cNvPr>
@@ -11256,7 +11456,7 @@
           <p:cNvPr id="7" name="">
             <a:extLst xmlns:a="http://schemas.openxmlformats.org/drawingml/2006/main">
               <a:ext uri="{FF2B5EF4-FFF2-40B4-BE49-F238E27FC236}">
-                <a16:creationId xmlns:a16="http://schemas.microsoft.com/office/drawing/2014/main" id="{EE056F48-09B6-4FA1-9B0A-CB12047E8BE5}"/>
+                <a16:creationId xmlns:a16="http://schemas.microsoft.com/office/drawing/2014/main" id="{1CA1E6CD-BE79-41EA-8C56-2E8FE9D7AA13}"/>
               </a:ext>
             </a:extLst>
           </p:cNvPr>
@@ -11288,7 +11488,7 @@
           <p:cNvPr id="8" name="">
             <a:extLst xmlns:a="http://schemas.openxmlformats.org/drawingml/2006/main">
               <a:ext uri="{FF2B5EF4-FFF2-40B4-BE49-F238E27FC236}">
-                <a16:creationId xmlns:a16="http://schemas.microsoft.com/office/drawing/2014/main" id="{CCFE93F0-52A4-4F02-9B3E-C58A0BE92642}"/>
+                <a16:creationId xmlns:a16="http://schemas.microsoft.com/office/drawing/2014/main" id="{40535FC0-72CE-4861-A704-3ABA76BD2107}"/>
               </a:ext>
             </a:extLst>
           </p:cNvPr>
@@ -11345,7 +11545,7 @@
           <p:cNvPr id="9" name="">
             <a:extLst xmlns:a="http://schemas.openxmlformats.org/drawingml/2006/main">
               <a:ext uri="{FF2B5EF4-FFF2-40B4-BE49-F238E27FC236}">
-                <a16:creationId xmlns:a16="http://schemas.microsoft.com/office/drawing/2014/main" id="{D4A7C0DF-0608-4CE6-8C8E-90316CA10DB2}"/>
+                <a16:creationId xmlns:a16="http://schemas.microsoft.com/office/drawing/2014/main" id="{C191F523-4336-4741-9177-B3AC124C05F7}"/>
               </a:ext>
             </a:extLst>
           </p:cNvPr>
@@ -11406,7 +11606,7 @@
           <p:nvPr/>
         </p:nvPicPr>
         <p:blipFill>
-          <a:blip xmlns:r="http://schemas.openxmlformats.org/officeDocument/2006/relationships" xmlns:a="http://schemas.openxmlformats.org/drawingml/2006/main" r:embed="Rb4b09c5a89ca4c6c"/>
+          <a:blip xmlns:r="http://schemas.openxmlformats.org/officeDocument/2006/relationships" xmlns:a="http://schemas.openxmlformats.org/drawingml/2006/main" r:embed="Rdb17bb8cbf6840fb"/>
           <a:stretch xmlns:a="http://schemas.openxmlformats.org/drawingml/2006/main"/>
         </p:blipFill>
         <p:spPr>
@@ -11424,7 +11624,7 @@
           <p:cNvPr id="11" name="">
             <a:extLst xmlns:a="http://schemas.openxmlformats.org/drawingml/2006/main">
               <a:ext uri="{FF2B5EF4-FFF2-40B4-BE49-F238E27FC236}">
-                <a16:creationId xmlns:a16="http://schemas.microsoft.com/office/drawing/2014/main" id="{2DEC53E3-88B0-44BE-BB66-DE03719C2CD4}"/>
+                <a16:creationId xmlns:a16="http://schemas.microsoft.com/office/drawing/2014/main" id="{64BB3FB1-7F04-4064-8478-9ECE02348099}"/>
               </a:ext>
             </a:extLst>
           </p:cNvPr>
@@ -11481,7 +11681,7 @@
           <p:cNvPr id="12" name="">
             <a:extLst xmlns:a="http://schemas.openxmlformats.org/drawingml/2006/main">
               <a:ext uri="{FF2B5EF4-FFF2-40B4-BE49-F238E27FC236}">
-                <a16:creationId xmlns:a16="http://schemas.microsoft.com/office/drawing/2014/main" id="{6C41CECB-C750-4111-A76B-0C79FE47D2D2}"/>
+                <a16:creationId xmlns:a16="http://schemas.microsoft.com/office/drawing/2014/main" id="{9DC00CF1-5B6C-43A6-AAE9-A2DDAF89B6FC}"/>
               </a:ext>
             </a:extLst>
           </p:cNvPr>
@@ -11538,7 +11738,7 @@
           <p:cNvPr id="13" name="">
             <a:extLst xmlns:a="http://schemas.openxmlformats.org/drawingml/2006/main">
               <a:ext uri="{FF2B5EF4-FFF2-40B4-BE49-F238E27FC236}">
-                <a16:creationId xmlns:a16="http://schemas.microsoft.com/office/drawing/2014/main" id="{F4C40052-E8AE-436B-B45C-2ED312C6A527}"/>
+                <a16:creationId xmlns:a16="http://schemas.microsoft.com/office/drawing/2014/main" id="{B618374F-1486-446F-B204-C3AA4132C96D}"/>
               </a:ext>
             </a:extLst>
           </p:cNvPr>
@@ -11570,7 +11770,7 @@
           <p:cNvPr id="14" name="">
             <a:extLst xmlns:a="http://schemas.openxmlformats.org/drawingml/2006/main">
               <a:ext uri="{FF2B5EF4-FFF2-40B4-BE49-F238E27FC236}">
-                <a16:creationId xmlns:a16="http://schemas.microsoft.com/office/drawing/2014/main" id="{7A1388C0-45EE-4DF1-AA49-5AF3A0B4CC65}"/>
+                <a16:creationId xmlns:a16="http://schemas.microsoft.com/office/drawing/2014/main" id="{450963A9-2498-48CF-830D-52C857F3A1B2}"/>
               </a:ext>
             </a:extLst>
           </p:cNvPr>
@@ -11627,7 +11827,7 @@
           <p:cNvPr id="15" name="">
             <a:extLst xmlns:a="http://schemas.openxmlformats.org/drawingml/2006/main">
               <a:ext uri="{FF2B5EF4-FFF2-40B4-BE49-F238E27FC236}">
-                <a16:creationId xmlns:a16="http://schemas.microsoft.com/office/drawing/2014/main" id="{2BB7B187-89E7-4D6E-B182-D314F68AA1EA}"/>
+                <a16:creationId xmlns:a16="http://schemas.microsoft.com/office/drawing/2014/main" id="{A4B92A65-72B9-4C62-B410-47566D0007D6}"/>
               </a:ext>
             </a:extLst>
           </p:cNvPr>
@@ -11682,7 +11882,7 @@
     </p:spTree>
     <p:extLst>
       <p:ext uri="{BB962C8B-B14F-4D97-AF65-F5344CB8AC3E}">
-        <p14:creationId xmlns:p14="http://schemas.microsoft.com/office/powerpoint/2010/main" val="1673312354"/>
+        <p14:creationId xmlns:p14="http://schemas.microsoft.com/office/powerpoint/2010/main" val="1560513977"/>
       </p:ext>
     </p:extLst>
   </p:cSld>
@@ -11837,7 +12037,7 @@
           <p:cNvPr id="23" name="">
             <a:extLst xmlns:a="http://schemas.openxmlformats.org/drawingml/2006/main">
               <a:ext uri="{FF2B5EF4-FFF2-40B4-BE49-F238E27FC236}">
-                <a16:creationId xmlns:a16="http://schemas.microsoft.com/office/drawing/2014/main" id="{9ACE900E-AC40-49F8-8C88-401B76DBFC3B}"/>
+                <a16:creationId xmlns:a16="http://schemas.microsoft.com/office/drawing/2014/main" id="{E18C6A4A-E612-4FC7-A409-65485EB91031}"/>
               </a:ext>
             </a:extLst>
           </p:cNvPr>
@@ -11869,7 +12069,7 @@
           <p:cNvPr id="2" name="">
             <a:extLst xmlns:a="http://schemas.openxmlformats.org/drawingml/2006/main">
               <a:ext uri="{FF2B5EF4-FFF2-40B4-BE49-F238E27FC236}">
-                <a16:creationId xmlns:a16="http://schemas.microsoft.com/office/drawing/2014/main" id="{F1793D7A-EBE2-490F-AB26-5A629DEBA745}"/>
+                <a16:creationId xmlns:a16="http://schemas.microsoft.com/office/drawing/2014/main" id="{71EF1565-D1EC-474D-A9CC-32BE1E99FF10}"/>
               </a:ext>
             </a:extLst>
           </p:cNvPr>
@@ -11926,7 +12126,7 @@
           <p:cNvPr id="3" name="">
             <a:extLst xmlns:a="http://schemas.openxmlformats.org/drawingml/2006/main">
               <a:ext uri="{FF2B5EF4-FFF2-40B4-BE49-F238E27FC236}">
-                <a16:creationId xmlns:a16="http://schemas.microsoft.com/office/drawing/2014/main" id="{EFCB258A-9F1D-4AEF-BD47-668E5090B2EE}"/>
+                <a16:creationId xmlns:a16="http://schemas.microsoft.com/office/drawing/2014/main" id="{2E911B45-8B3E-4F67-B10E-05F9997EC0D7}"/>
               </a:ext>
             </a:extLst>
           </p:cNvPr>
@@ -11958,7 +12158,7 @@
           <p:cNvPr id="4" name="">
             <a:extLst xmlns:a="http://schemas.openxmlformats.org/drawingml/2006/main">
               <a:ext uri="{FF2B5EF4-FFF2-40B4-BE49-F238E27FC236}">
-                <a16:creationId xmlns:a16="http://schemas.microsoft.com/office/drawing/2014/main" id="{DB64F26F-466B-4612-946B-AD26813867D5}"/>
+                <a16:creationId xmlns:a16="http://schemas.microsoft.com/office/drawing/2014/main" id="{F7CB6E61-0592-4481-B763-6A07180C3BC6}"/>
               </a:ext>
             </a:extLst>
           </p:cNvPr>
@@ -12015,7 +12215,7 @@
           <p:cNvPr id="5" name="">
             <a:extLst xmlns:a="http://schemas.openxmlformats.org/drawingml/2006/main">
               <a:ext uri="{FF2B5EF4-FFF2-40B4-BE49-F238E27FC236}">
-                <a16:creationId xmlns:a16="http://schemas.microsoft.com/office/drawing/2014/main" id="{E10F8363-7FB2-430D-87AF-0B0B030FA32D}"/>
+                <a16:creationId xmlns:a16="http://schemas.microsoft.com/office/drawing/2014/main" id="{407EB6E4-5236-4824-B1F1-B88A9BF044C4}"/>
               </a:ext>
             </a:extLst>
           </p:cNvPr>
@@ -12072,7 +12272,7 @@
           <p:cNvPr id="6" name="">
             <a:extLst xmlns:a="http://schemas.openxmlformats.org/drawingml/2006/main">
               <a:ext uri="{FF2B5EF4-FFF2-40B4-BE49-F238E27FC236}">
-                <a16:creationId xmlns:a16="http://schemas.microsoft.com/office/drawing/2014/main" id="{87EEE15C-1564-4B2C-971B-EBB55951EDC4}"/>
+                <a16:creationId xmlns:a16="http://schemas.microsoft.com/office/drawing/2014/main" id="{DCA35048-D245-41D9-9BFC-D8B309054B73}"/>
               </a:ext>
             </a:extLst>
           </p:cNvPr>
@@ -12129,7 +12329,7 @@
           <p:cNvPr id="7" name="">
             <a:extLst xmlns:a="http://schemas.openxmlformats.org/drawingml/2006/main">
               <a:ext uri="{FF2B5EF4-FFF2-40B4-BE49-F238E27FC236}">
-                <a16:creationId xmlns:a16="http://schemas.microsoft.com/office/drawing/2014/main" id="{7BAA9347-32C7-48C1-A567-B423293FFE54}"/>
+                <a16:creationId xmlns:a16="http://schemas.microsoft.com/office/drawing/2014/main" id="{5B4782D9-FE98-43BC-B5BA-C283C9B439AD}"/>
               </a:ext>
             </a:extLst>
           </p:cNvPr>
@@ -12161,7 +12361,7 @@
           <p:cNvPr id="8" name="">
             <a:extLst xmlns:a="http://schemas.openxmlformats.org/drawingml/2006/main">
               <a:ext uri="{FF2B5EF4-FFF2-40B4-BE49-F238E27FC236}">
-                <a16:creationId xmlns:a16="http://schemas.microsoft.com/office/drawing/2014/main" id="{F622BD82-E65E-4A59-AC6A-2F3302328DD3}"/>
+                <a16:creationId xmlns:a16="http://schemas.microsoft.com/office/drawing/2014/main" id="{EF26D66D-31CB-47CC-AA24-886ED694E2D1}"/>
               </a:ext>
             </a:extLst>
           </p:cNvPr>
@@ -12218,7 +12418,7 @@
           <p:cNvPr id="9" name="">
             <a:extLst xmlns:a="http://schemas.openxmlformats.org/drawingml/2006/main">
               <a:ext uri="{FF2B5EF4-FFF2-40B4-BE49-F238E27FC236}">
-                <a16:creationId xmlns:a16="http://schemas.microsoft.com/office/drawing/2014/main" id="{74AB99FD-7D77-426E-AD2A-01A8B7046DF9}"/>
+                <a16:creationId xmlns:a16="http://schemas.microsoft.com/office/drawing/2014/main" id="{1A44E868-2E66-459A-A375-70497D238B19}"/>
               </a:ext>
             </a:extLst>
           </p:cNvPr>
@@ -12275,7 +12475,7 @@
           <p:cNvPr id="10" name="">
             <a:extLst xmlns:a="http://schemas.openxmlformats.org/drawingml/2006/main">
               <a:ext uri="{FF2B5EF4-FFF2-40B4-BE49-F238E27FC236}">
-                <a16:creationId xmlns:a16="http://schemas.microsoft.com/office/drawing/2014/main" id="{D68ADD59-8081-4008-B262-E3A3EFBF67C3}"/>
+                <a16:creationId xmlns:a16="http://schemas.microsoft.com/office/drawing/2014/main" id="{5F4DD836-8267-4F76-B094-BB926E6F08F0}"/>
               </a:ext>
             </a:extLst>
           </p:cNvPr>
@@ -12309,7 +12509,7 @@
           <p:cNvPr id="11" name="">
             <a:extLst xmlns:a="http://schemas.openxmlformats.org/drawingml/2006/main">
               <a:ext uri="{FF2B5EF4-FFF2-40B4-BE49-F238E27FC236}">
-                <a16:creationId xmlns:a16="http://schemas.microsoft.com/office/drawing/2014/main" id="{3AF62DBD-530F-42EB-B498-53D60A7AC414}"/>
+                <a16:creationId xmlns:a16="http://schemas.microsoft.com/office/drawing/2014/main" id="{80C0CC5A-1DBA-4492-9BF8-3283020107F1}"/>
               </a:ext>
             </a:extLst>
           </p:cNvPr>
@@ -12341,7 +12541,7 @@
           <p:cNvPr id="12" name="">
             <a:extLst xmlns:a="http://schemas.openxmlformats.org/drawingml/2006/main">
               <a:ext uri="{FF2B5EF4-FFF2-40B4-BE49-F238E27FC236}">
-                <a16:creationId xmlns:a16="http://schemas.microsoft.com/office/drawing/2014/main" id="{B7A86999-23A5-4FCF-8364-1539A6375231}"/>
+                <a16:creationId xmlns:a16="http://schemas.microsoft.com/office/drawing/2014/main" id="{9C47DB22-45EA-4E11-BAE5-CC10E7EE5B00}"/>
               </a:ext>
             </a:extLst>
           </p:cNvPr>
@@ -12398,7 +12598,7 @@
           <p:cNvPr id="13" name="">
             <a:extLst xmlns:a="http://schemas.openxmlformats.org/drawingml/2006/main">
               <a:ext uri="{FF2B5EF4-FFF2-40B4-BE49-F238E27FC236}">
-                <a16:creationId xmlns:a16="http://schemas.microsoft.com/office/drawing/2014/main" id="{B13E850A-A0F5-4C0A-9C30-AA89C59AA6F4}"/>
+                <a16:creationId xmlns:a16="http://schemas.microsoft.com/office/drawing/2014/main" id="{42F00A05-8E66-48A7-8A83-884EED197A24}"/>
               </a:ext>
             </a:extLst>
           </p:cNvPr>
@@ -12455,7 +12655,7 @@
           <p:cNvPr id="14" name="">
             <a:extLst xmlns:a="http://schemas.openxmlformats.org/drawingml/2006/main">
               <a:ext uri="{FF2B5EF4-FFF2-40B4-BE49-F238E27FC236}">
-                <a16:creationId xmlns:a16="http://schemas.microsoft.com/office/drawing/2014/main" id="{C2C13C91-AD9D-4913-B5D9-A457AF0D9003}"/>
+                <a16:creationId xmlns:a16="http://schemas.microsoft.com/office/drawing/2014/main" id="{48915EDB-B016-47F7-86E2-61F3440EC40C}"/>
               </a:ext>
             </a:extLst>
           </p:cNvPr>
@@ -12489,7 +12689,7 @@
           <p:cNvPr id="15" name="">
             <a:extLst xmlns:a="http://schemas.openxmlformats.org/drawingml/2006/main">
               <a:ext uri="{FF2B5EF4-FFF2-40B4-BE49-F238E27FC236}">
-                <a16:creationId xmlns:a16="http://schemas.microsoft.com/office/drawing/2014/main" id="{05480009-89C9-46F5-9B87-B520A5150F15}"/>
+                <a16:creationId xmlns:a16="http://schemas.microsoft.com/office/drawing/2014/main" id="{4E67730B-5825-4396-9FFD-8D8AD0821075}"/>
               </a:ext>
             </a:extLst>
           </p:cNvPr>
@@ -12521,7 +12721,7 @@
           <p:cNvPr id="16" name="">
             <a:extLst xmlns:a="http://schemas.openxmlformats.org/drawingml/2006/main">
               <a:ext uri="{FF2B5EF4-FFF2-40B4-BE49-F238E27FC236}">
-                <a16:creationId xmlns:a16="http://schemas.microsoft.com/office/drawing/2014/main" id="{294E80CB-728F-4668-B4FC-2B885602EA22}"/>
+                <a16:creationId xmlns:a16="http://schemas.microsoft.com/office/drawing/2014/main" id="{F7652F3A-ADE8-4B21-8A7F-D48D3776D0F4}"/>
               </a:ext>
             </a:extLst>
           </p:cNvPr>
@@ -12578,7 +12778,7 @@
           <p:cNvPr id="17" name="">
             <a:extLst xmlns:a="http://schemas.openxmlformats.org/drawingml/2006/main">
               <a:ext uri="{FF2B5EF4-FFF2-40B4-BE49-F238E27FC236}">
-                <a16:creationId xmlns:a16="http://schemas.microsoft.com/office/drawing/2014/main" id="{6CB0F8F2-A016-4D58-9F3F-D2C7BB8C36DD}"/>
+                <a16:creationId xmlns:a16="http://schemas.microsoft.com/office/drawing/2014/main" id="{BBEFD439-18CA-4B12-AB69-72891D46FEBA}"/>
               </a:ext>
             </a:extLst>
           </p:cNvPr>
@@ -12635,7 +12835,7 @@
           <p:cNvPr id="18" name="">
             <a:extLst xmlns:a="http://schemas.openxmlformats.org/drawingml/2006/main">
               <a:ext uri="{FF2B5EF4-FFF2-40B4-BE49-F238E27FC236}">
-                <a16:creationId xmlns:a16="http://schemas.microsoft.com/office/drawing/2014/main" id="{E96F4C71-B34A-413B-B1D6-ABDE997AFF09}"/>
+                <a16:creationId xmlns:a16="http://schemas.microsoft.com/office/drawing/2014/main" id="{A4634B4E-C782-4FDA-A49C-51A439C3EC94}"/>
               </a:ext>
             </a:extLst>
           </p:cNvPr>
@@ -12669,7 +12869,7 @@
           <p:cNvPr id="19" name="">
             <a:extLst xmlns:a="http://schemas.openxmlformats.org/drawingml/2006/main">
               <a:ext uri="{FF2B5EF4-FFF2-40B4-BE49-F238E27FC236}">
-                <a16:creationId xmlns:a16="http://schemas.microsoft.com/office/drawing/2014/main" id="{F15E5260-F8D4-4DC1-BE62-048292F2A7AB}"/>
+                <a16:creationId xmlns:a16="http://schemas.microsoft.com/office/drawing/2014/main" id="{5882F24C-1678-4A5C-8D8A-FFD232271B08}"/>
               </a:ext>
             </a:extLst>
           </p:cNvPr>
@@ -12701,7 +12901,7 @@
           <p:cNvPr id="20" name="">
             <a:extLst xmlns:a="http://schemas.openxmlformats.org/drawingml/2006/main">
               <a:ext uri="{FF2B5EF4-FFF2-40B4-BE49-F238E27FC236}">
-                <a16:creationId xmlns:a16="http://schemas.microsoft.com/office/drawing/2014/main" id="{0E589229-1D26-4645-83F9-1F593AD99294}"/>
+                <a16:creationId xmlns:a16="http://schemas.microsoft.com/office/drawing/2014/main" id="{4D62D87B-10BE-4F39-B795-BB0B26C83664}"/>
               </a:ext>
             </a:extLst>
           </p:cNvPr>
@@ -12758,7 +12958,7 @@
           <p:cNvPr id="21" name="">
             <a:extLst xmlns:a="http://schemas.openxmlformats.org/drawingml/2006/main">
               <a:ext uri="{FF2B5EF4-FFF2-40B4-BE49-F238E27FC236}">
-                <a16:creationId xmlns:a16="http://schemas.microsoft.com/office/drawing/2014/main" id="{7A78601C-3EAF-4398-8D65-51A9AB13274C}"/>
+                <a16:creationId xmlns:a16="http://schemas.microsoft.com/office/drawing/2014/main" id="{E0A7E6DA-B1C9-4E8D-A8EE-A1A6586B6C75}"/>
               </a:ext>
             </a:extLst>
           </p:cNvPr>
@@ -12815,7 +13015,7 @@
           <p:cNvPr id="22" name="">
             <a:extLst xmlns:a="http://schemas.openxmlformats.org/drawingml/2006/main">
               <a:ext uri="{FF2B5EF4-FFF2-40B4-BE49-F238E27FC236}">
-                <a16:creationId xmlns:a16="http://schemas.microsoft.com/office/drawing/2014/main" id="{DC41A62F-8C7A-4447-A3E0-CB761CFDAAEA}"/>
+                <a16:creationId xmlns:a16="http://schemas.microsoft.com/office/drawing/2014/main" id="{CF70A3E0-BD52-4948-B867-BBF16C6520DA}"/>
               </a:ext>
             </a:extLst>
           </p:cNvPr>
@@ -12870,7 +13070,7 @@
     </p:spTree>
     <p:extLst>
       <p:ext uri="{BB962C8B-B14F-4D97-AF65-F5344CB8AC3E}">
-        <p14:creationId xmlns:p14="http://schemas.microsoft.com/office/powerpoint/2010/main" val="1574412726"/>
+        <p14:creationId xmlns:p14="http://schemas.microsoft.com/office/powerpoint/2010/main" val="740037795"/>
       </p:ext>
     </p:extLst>
   </p:cSld>
@@ -13071,7 +13271,7 @@
           <p:cNvPr id="22" name="">
             <a:extLst xmlns:a="http://schemas.openxmlformats.org/drawingml/2006/main">
               <a:ext uri="{FF2B5EF4-FFF2-40B4-BE49-F238E27FC236}">
-                <a16:creationId xmlns:a16="http://schemas.microsoft.com/office/drawing/2014/main" id="{FF63F7F4-C4C4-49AB-9154-D5EEB960CC06}"/>
+                <a16:creationId xmlns:a16="http://schemas.microsoft.com/office/drawing/2014/main" id="{15668764-051A-41BB-9944-B16F710666CC}"/>
               </a:ext>
             </a:extLst>
           </p:cNvPr>
@@ -13103,7 +13303,7 @@
           <p:cNvPr id="2" name="">
             <a:extLst xmlns:a="http://schemas.openxmlformats.org/drawingml/2006/main">
               <a:ext uri="{FF2B5EF4-FFF2-40B4-BE49-F238E27FC236}">
-                <a16:creationId xmlns:a16="http://schemas.microsoft.com/office/drawing/2014/main" id="{0EF1BAFB-A9C2-4ECD-B9D4-D8390EE0E305}"/>
+                <a16:creationId xmlns:a16="http://schemas.microsoft.com/office/drawing/2014/main" id="{9350511A-419E-440F-8A80-714F4E75EE56}"/>
               </a:ext>
             </a:extLst>
           </p:cNvPr>
@@ -13160,7 +13360,7 @@
           <p:cNvPr id="3" name="">
             <a:extLst xmlns:a="http://schemas.openxmlformats.org/drawingml/2006/main">
               <a:ext uri="{FF2B5EF4-FFF2-40B4-BE49-F238E27FC236}">
-                <a16:creationId xmlns:a16="http://schemas.microsoft.com/office/drawing/2014/main" id="{7585572C-BC55-4560-B0B6-5763F8220456}"/>
+                <a16:creationId xmlns:a16="http://schemas.microsoft.com/office/drawing/2014/main" id="{B72E00F0-9664-44EB-B9BC-AFE7F67C4128}"/>
               </a:ext>
             </a:extLst>
           </p:cNvPr>
@@ -13192,7 +13392,7 @@
           <p:cNvPr id="4" name="">
             <a:extLst xmlns:a="http://schemas.openxmlformats.org/drawingml/2006/main">
               <a:ext uri="{FF2B5EF4-FFF2-40B4-BE49-F238E27FC236}">
-                <a16:creationId xmlns:a16="http://schemas.microsoft.com/office/drawing/2014/main" id="{B4A91F87-8FC4-42B1-9390-39E12862EAAF}"/>
+                <a16:creationId xmlns:a16="http://schemas.microsoft.com/office/drawing/2014/main" id="{5ADC5100-79F3-4CAD-9144-C1DF8522E27A}"/>
               </a:ext>
             </a:extLst>
           </p:cNvPr>
@@ -13249,7 +13449,7 @@
           <p:cNvPr id="5" name="">
             <a:extLst xmlns:a="http://schemas.openxmlformats.org/drawingml/2006/main">
               <a:ext uri="{FF2B5EF4-FFF2-40B4-BE49-F238E27FC236}">
-                <a16:creationId xmlns:a16="http://schemas.microsoft.com/office/drawing/2014/main" id="{FBCB1988-C54E-46AA-A435-DEA78CDAE49B}"/>
+                <a16:creationId xmlns:a16="http://schemas.microsoft.com/office/drawing/2014/main" id="{E9FA8FF3-0E91-4636-AF95-837A4CBA2422}"/>
               </a:ext>
             </a:extLst>
           </p:cNvPr>
@@ -13306,7 +13506,7 @@
           <p:cNvPr id="6" name="">
             <a:extLst xmlns:a="http://schemas.openxmlformats.org/drawingml/2006/main">
               <a:ext uri="{FF2B5EF4-FFF2-40B4-BE49-F238E27FC236}">
-                <a16:creationId xmlns:a16="http://schemas.microsoft.com/office/drawing/2014/main" id="{53010E4E-3E10-4548-B832-924B9BB96696}"/>
+                <a16:creationId xmlns:a16="http://schemas.microsoft.com/office/drawing/2014/main" id="{3B6B0D00-204F-46DA-90BE-CE0699606FBF}"/>
               </a:ext>
             </a:extLst>
           </p:cNvPr>
@@ -13363,7 +13563,7 @@
           <p:cNvPr id="7" name="">
             <a:extLst xmlns:a="http://schemas.openxmlformats.org/drawingml/2006/main">
               <a:ext uri="{FF2B5EF4-FFF2-40B4-BE49-F238E27FC236}">
-                <a16:creationId xmlns:a16="http://schemas.microsoft.com/office/drawing/2014/main" id="{7E98367C-686F-4729-BE16-E0E86A987B61}"/>
+                <a16:creationId xmlns:a16="http://schemas.microsoft.com/office/drawing/2014/main" id="{19D8DA91-03DD-4ED6-9C1F-E93C025D5662}"/>
               </a:ext>
             </a:extLst>
           </p:cNvPr>
@@ -13395,7 +13595,7 @@
           <p:cNvPr id="8" name="">
             <a:extLst xmlns:a="http://schemas.openxmlformats.org/drawingml/2006/main">
               <a:ext uri="{FF2B5EF4-FFF2-40B4-BE49-F238E27FC236}">
-                <a16:creationId xmlns:a16="http://schemas.microsoft.com/office/drawing/2014/main" id="{332CA183-8165-4490-AEA6-6F890C281625}"/>
+                <a16:creationId xmlns:a16="http://schemas.microsoft.com/office/drawing/2014/main" id="{425E0FA3-2FDC-4E86-8790-375BAED69898}"/>
               </a:ext>
             </a:extLst>
           </p:cNvPr>
@@ -13452,7 +13652,7 @@
           <p:cNvPr id="9" name="">
             <a:extLst xmlns:a="http://schemas.openxmlformats.org/drawingml/2006/main">
               <a:ext uri="{FF2B5EF4-FFF2-40B4-BE49-F238E27FC236}">
-                <a16:creationId xmlns:a16="http://schemas.microsoft.com/office/drawing/2014/main" id="{2D81D4EB-3E6C-49CD-AAA0-0E28DA69A81D}"/>
+                <a16:creationId xmlns:a16="http://schemas.microsoft.com/office/drawing/2014/main" id="{2AA0BF83-4F16-40BF-8BB2-791166108752}"/>
               </a:ext>
             </a:extLst>
           </p:cNvPr>
@@ -13509,7 +13709,7 @@
           <p:cNvPr id="10" name="">
             <a:extLst xmlns:a="http://schemas.openxmlformats.org/drawingml/2006/main">
               <a:ext uri="{FF2B5EF4-FFF2-40B4-BE49-F238E27FC236}">
-                <a16:creationId xmlns:a16="http://schemas.microsoft.com/office/drawing/2014/main" id="{0E816262-B8B4-4C71-A620-567E2488D39F}"/>
+                <a16:creationId xmlns:a16="http://schemas.microsoft.com/office/drawing/2014/main" id="{3F08847B-EA2C-4892-8933-33DA3FD589A7}"/>
               </a:ext>
             </a:extLst>
           </p:cNvPr>
@@ -13543,7 +13743,7 @@
           <p:cNvPr id="11" name="">
             <a:extLst xmlns:a="http://schemas.openxmlformats.org/drawingml/2006/main">
               <a:ext uri="{FF2B5EF4-FFF2-40B4-BE49-F238E27FC236}">
-                <a16:creationId xmlns:a16="http://schemas.microsoft.com/office/drawing/2014/main" id="{B871D0E6-20EF-4C76-A9DA-566B104AC7D9}"/>
+                <a16:creationId xmlns:a16="http://schemas.microsoft.com/office/drawing/2014/main" id="{62025C7D-A8CB-407E-A877-8ABE4A510CB6}"/>
               </a:ext>
             </a:extLst>
           </p:cNvPr>
@@ -13575,7 +13775,7 @@
           <p:cNvPr id="12" name="">
             <a:extLst xmlns:a="http://schemas.openxmlformats.org/drawingml/2006/main">
               <a:ext uri="{FF2B5EF4-FFF2-40B4-BE49-F238E27FC236}">
-                <a16:creationId xmlns:a16="http://schemas.microsoft.com/office/drawing/2014/main" id="{23A8351A-7DA4-444A-9A79-BFCC8594F2B4}"/>
+                <a16:creationId xmlns:a16="http://schemas.microsoft.com/office/drawing/2014/main" id="{8441EDC7-93D0-4AE9-A6D0-B21116B91706}"/>
               </a:ext>
             </a:extLst>
           </p:cNvPr>
@@ -13632,7 +13832,7 @@
           <p:cNvPr id="13" name="">
             <a:extLst xmlns:a="http://schemas.openxmlformats.org/drawingml/2006/main">
               <a:ext uri="{FF2B5EF4-FFF2-40B4-BE49-F238E27FC236}">
-                <a16:creationId xmlns:a16="http://schemas.microsoft.com/office/drawing/2014/main" id="{4089C879-D3C2-4DB6-81ED-ACB340211F87}"/>
+                <a16:creationId xmlns:a16="http://schemas.microsoft.com/office/drawing/2014/main" id="{7FFAF71E-9515-4406-B073-17BC21EDED98}"/>
               </a:ext>
             </a:extLst>
           </p:cNvPr>
@@ -13689,7 +13889,7 @@
           <p:cNvPr id="14" name="">
             <a:extLst xmlns:a="http://schemas.openxmlformats.org/drawingml/2006/main">
               <a:ext uri="{FF2B5EF4-FFF2-40B4-BE49-F238E27FC236}">
-                <a16:creationId xmlns:a16="http://schemas.microsoft.com/office/drawing/2014/main" id="{ADF0A998-601A-4BE9-B4E5-07AA16046159}"/>
+                <a16:creationId xmlns:a16="http://schemas.microsoft.com/office/drawing/2014/main" id="{10A3A4F6-8830-4778-8710-D4FAEE4FCB6B}"/>
               </a:ext>
             </a:extLst>
           </p:cNvPr>
@@ -13723,7 +13923,7 @@
           <p:cNvPr id="15" name="">
             <a:extLst xmlns:a="http://schemas.openxmlformats.org/drawingml/2006/main">
               <a:ext uri="{FF2B5EF4-FFF2-40B4-BE49-F238E27FC236}">
-                <a16:creationId xmlns:a16="http://schemas.microsoft.com/office/drawing/2014/main" id="{52FB7E22-8E38-40A9-A35B-8585C0AB84D3}"/>
+                <a16:creationId xmlns:a16="http://schemas.microsoft.com/office/drawing/2014/main" id="{FA48BCD6-AD9A-4E34-B50A-CCAA171CFCBA}"/>
               </a:ext>
             </a:extLst>
           </p:cNvPr>
@@ -13755,7 +13955,7 @@
           <p:cNvPr id="16" name="">
             <a:extLst xmlns:a="http://schemas.openxmlformats.org/drawingml/2006/main">
               <a:ext uri="{FF2B5EF4-FFF2-40B4-BE49-F238E27FC236}">
-                <a16:creationId xmlns:a16="http://schemas.microsoft.com/office/drawing/2014/main" id="{34E2510F-97D2-4A19-A959-0D90EB90321C}"/>
+                <a16:creationId xmlns:a16="http://schemas.microsoft.com/office/drawing/2014/main" id="{D40BBE8A-11F0-41C4-BECB-5F7CE1F0AE5D}"/>
               </a:ext>
             </a:extLst>
           </p:cNvPr>
@@ -13812,7 +14012,7 @@
           <p:cNvPr id="17" name="">
             <a:extLst xmlns:a="http://schemas.openxmlformats.org/drawingml/2006/main">
               <a:ext uri="{FF2B5EF4-FFF2-40B4-BE49-F238E27FC236}">
-                <a16:creationId xmlns:a16="http://schemas.microsoft.com/office/drawing/2014/main" id="{A7834312-C3B0-4F58-9063-9C3A47FC06CC}"/>
+                <a16:creationId xmlns:a16="http://schemas.microsoft.com/office/drawing/2014/main" id="{4B58A2E5-653D-4FA0-98BF-2E4C1B5FE621}"/>
               </a:ext>
             </a:extLst>
           </p:cNvPr>
@@ -13869,7 +14069,7 @@
           <p:cNvPr id="18" name="">
             <a:extLst xmlns:a="http://schemas.openxmlformats.org/drawingml/2006/main">
               <a:ext uri="{FF2B5EF4-FFF2-40B4-BE49-F238E27FC236}">
-                <a16:creationId xmlns:a16="http://schemas.microsoft.com/office/drawing/2014/main" id="{C23D9D3D-9B46-4476-A739-875737A1D3AD}"/>
+                <a16:creationId xmlns:a16="http://schemas.microsoft.com/office/drawing/2014/main" id="{B418A3FE-721C-4C0F-81F1-B9515239AC8E}"/>
               </a:ext>
             </a:extLst>
           </p:cNvPr>
@@ -13903,7 +14103,7 @@
           <p:cNvPr id="19" name="">
             <a:extLst xmlns:a="http://schemas.openxmlformats.org/drawingml/2006/main">
               <a:ext uri="{FF2B5EF4-FFF2-40B4-BE49-F238E27FC236}">
-                <a16:creationId xmlns:a16="http://schemas.microsoft.com/office/drawing/2014/main" id="{38FEA9C7-DDB9-49B4-82F5-03734363C4E6}"/>
+                <a16:creationId xmlns:a16="http://schemas.microsoft.com/office/drawing/2014/main" id="{B6707F7C-D426-40C0-A229-1D6CE6481860}"/>
               </a:ext>
             </a:extLst>
           </p:cNvPr>
@@ -13935,7 +14135,7 @@
           <p:cNvPr id="20" name="">
             <a:extLst xmlns:a="http://schemas.openxmlformats.org/drawingml/2006/main">
               <a:ext uri="{FF2B5EF4-FFF2-40B4-BE49-F238E27FC236}">
-                <a16:creationId xmlns:a16="http://schemas.microsoft.com/office/drawing/2014/main" id="{9130BF5E-2AE2-46BE-94E0-4F4ECB720CB7}"/>
+                <a16:creationId xmlns:a16="http://schemas.microsoft.com/office/drawing/2014/main" id="{951BB235-3177-476E-A291-0316925E2AD8}"/>
               </a:ext>
             </a:extLst>
           </p:cNvPr>
@@ -13992,7 +14192,7 @@
           <p:cNvPr id="21" name="">
             <a:extLst xmlns:a="http://schemas.openxmlformats.org/drawingml/2006/main">
               <a:ext uri="{FF2B5EF4-FFF2-40B4-BE49-F238E27FC236}">
-                <a16:creationId xmlns:a16="http://schemas.microsoft.com/office/drawing/2014/main" id="{EA20E8B2-4B70-47FD-8311-4B3C932AD905}"/>
+                <a16:creationId xmlns:a16="http://schemas.microsoft.com/office/drawing/2014/main" id="{88B0B3E5-785C-45F4-8D75-58BDBC98BFA3}"/>
               </a:ext>
             </a:extLst>
           </p:cNvPr>
@@ -14047,7 +14247,7 @@
     </p:spTree>
     <p:extLst>
       <p:ext uri="{BB962C8B-B14F-4D97-AF65-F5344CB8AC3E}">
-        <p14:creationId xmlns:p14="http://schemas.microsoft.com/office/powerpoint/2010/main" val="404797772"/>
+        <p14:creationId xmlns:p14="http://schemas.microsoft.com/office/powerpoint/2010/main" val="1347148610"/>
       </p:ext>
     </p:extLst>
   </p:cSld>
